--- a/說明/生理訊號中繼裝置_操作說明.pptx
+++ b/說明/生理訊號中繼裝置_操作說明.pptx
@@ -5,10 +5,10 @@
     <p:sldMasterId id="2147483650" r:id="rId1"/>
   </p:sldMasterIdLst>
   <p:notesMasterIdLst>
-    <p:notesMasterId r:id="rId27"/>
+    <p:notesMasterId r:id="rId28"/>
   </p:notesMasterIdLst>
   <p:handoutMasterIdLst>
-    <p:handoutMasterId r:id="rId28"/>
+    <p:handoutMasterId r:id="rId29"/>
   </p:handoutMasterIdLst>
   <p:sldIdLst>
     <p:sldId id="256" r:id="rId2"/>
@@ -30,13 +30,13 @@
     <p:sldId id="281" r:id="rId18"/>
     <p:sldId id="282" r:id="rId19"/>
     <p:sldId id="283" r:id="rId20"/>
-    <p:sldId id="284" r:id="rId33"/>
-    <p:sldId id="273" r:id="rId21"/>
-    <p:sldId id="274" r:id="rId22"/>
-    <p:sldId id="275" r:id="rId23"/>
-    <p:sldId id="276" r:id="rId24"/>
-    <p:sldId id="277" r:id="rId25"/>
-    <p:sldId id="278" r:id="rId26"/>
+    <p:sldId id="284" r:id="rId21"/>
+    <p:sldId id="273" r:id="rId22"/>
+    <p:sldId id="274" r:id="rId23"/>
+    <p:sldId id="275" r:id="rId24"/>
+    <p:sldId id="276" r:id="rId25"/>
+    <p:sldId id="277" r:id="rId26"/>
+    <p:sldId id="278" r:id="rId27"/>
   </p:sldIdLst>
   <p:sldSz cx="9144000" cy="6858000" type="screen4x3"/>
   <p:notesSz cx="6858000" cy="9144000"/>
@@ -528,7 +528,7 @@
               <a:pPr>
                 <a:defRPr/>
               </a:pPr>
-              <a:t>2026/8/31</a:t>
+              <a:t>2026/9/1</a:t>
             </a:fld>
             <a:endParaRPr lang="zh-TW" altLang="en-US"/>
           </a:p>
@@ -5264,388 +5264,6 @@
       </p:sp>
       <p:sp>
         <p:nvSpPr>
-          <p:cNvPr id="6" name="TextBox 5"/>
-          <p:cNvSpPr txBox="1"/>
-          <p:nvPr/>
-        </p:nvSpPr>
-        <p:spPr>
-          <a:xfrm>
-            <a:off x="5760720" y="1234440"/>
-            <a:ext cx="2926080" cy="5212080"/>
-          </a:xfrm>
-          <a:prstGeom prst="rect">
-            <a:avLst/>
-          </a:prstGeom>
-          <a:noFill/>
-        </p:spPr>
-        <p:txBody>
-          <a:bodyPr wrap="square">
-            <a:spAutoFit/>
-          </a:bodyPr>
-          <a:lstStyle/>
-          <a:p>
-            <a:pPr>
-              <a:spcAft>
-                <a:spcPts val="1000"/>
-              </a:spcAft>
-            </a:pPr>
-            <a:r>
-              <a:rPr sz="1350" b="1" dirty="0">
-                <a:solidFill>
-                  <a:srgbClr val="333333"/>
-                </a:solidFill>
-                <a:latin typeface="微軟正黑體"/>
-                <a:ea typeface="微軟正黑體"/>
-                <a:cs typeface="微軟正黑體"/>
-              </a:rPr>
-              <a:t>•  Wi-Fi </a:t>
-            </a:r>
-            <a:r>
-              <a:rPr sz="1350" b="1" dirty="0" err="1">
-                <a:solidFill>
-                  <a:srgbClr val="333333"/>
-                </a:solidFill>
-                <a:latin typeface="微軟正黑體"/>
-                <a:ea typeface="微軟正黑體"/>
-                <a:cs typeface="微軟正黑體"/>
-              </a:rPr>
-              <a:t>名稱／密碼／個案身份證字號（供核對用</a:t>
-            </a:r>
-            <a:r>
-              <a:rPr sz="1350" b="1" dirty="0">
-                <a:solidFill>
-                  <a:srgbClr val="333333"/>
-                </a:solidFill>
-                <a:latin typeface="微軟正黑體"/>
-                <a:ea typeface="微軟正黑體"/>
-                <a:cs typeface="微軟正黑體"/>
-              </a:rPr>
-              <a:t>）</a:t>
-            </a:r>
-          </a:p>
-          <a:p>
-            <a:pPr>
-              <a:spcAft>
-                <a:spcPts val="1000"/>
-              </a:spcAft>
-            </a:pPr>
-            <a:r>
-              <a:rPr sz="1150" dirty="0">
-                <a:solidFill>
-                  <a:srgbClr val="757575"/>
-                </a:solidFill>
-                <a:latin typeface="微軟正黑體"/>
-                <a:ea typeface="微軟正黑體"/>
-                <a:cs typeface="微軟正黑體"/>
-              </a:rPr>
-              <a:t>     </a:t>
-            </a:r>
-            <a:r>
-              <a:rPr sz="1150" dirty="0" err="1">
-                <a:solidFill>
-                  <a:srgbClr val="757575"/>
-                </a:solidFill>
-                <a:latin typeface="微軟正黑體"/>
-                <a:ea typeface="微軟正黑體"/>
-                <a:cs typeface="微軟正黑體"/>
-              </a:rPr>
-              <a:t>黑底白字是欄位名稱，下面才是實際的值</a:t>
-            </a:r>
-            <a:endParaRPr sz="1150" dirty="0">
-              <a:solidFill>
-                <a:srgbClr val="757575"/>
-              </a:solidFill>
-              <a:latin typeface="微軟正黑體"/>
-              <a:ea typeface="微軟正黑體"/>
-              <a:cs typeface="微軟正黑體"/>
-            </a:endParaRPr>
-          </a:p>
-          <a:p>
-            <a:pPr>
-              <a:spcAft>
-                <a:spcPts val="1000"/>
-              </a:spcAft>
-            </a:pPr>
-            <a:r>
-              <a:rPr sz="1350" b="1" dirty="0">
-                <a:solidFill>
-                  <a:srgbClr val="333333"/>
-                </a:solidFill>
-                <a:latin typeface="微軟正黑體"/>
-                <a:ea typeface="微軟正黑體"/>
-                <a:cs typeface="微軟正黑體"/>
-              </a:rPr>
-              <a:t>2  「1. Join </a:t>
-            </a:r>
-            <a:r>
-              <a:rPr sz="1350" b="1" dirty="0" err="1">
-                <a:solidFill>
-                  <a:srgbClr val="333333"/>
-                </a:solidFill>
-                <a:latin typeface="微軟正黑體"/>
-                <a:ea typeface="微軟正黑體"/>
-                <a:cs typeface="微軟正黑體"/>
-              </a:rPr>
-              <a:t>WiFi」QR</a:t>
-            </a:r>
-            <a:r>
-              <a:rPr sz="1350" b="1" dirty="0">
-                <a:solidFill>
-                  <a:srgbClr val="333333"/>
-                </a:solidFill>
-                <a:latin typeface="微軟正黑體"/>
-                <a:ea typeface="微軟正黑體"/>
-                <a:cs typeface="微軟正黑體"/>
-              </a:rPr>
-              <a:t> </a:t>
-            </a:r>
-            <a:r>
-              <a:rPr sz="1350" b="1" dirty="0" err="1">
-                <a:solidFill>
-                  <a:srgbClr val="333333"/>
-                </a:solidFill>
-                <a:latin typeface="微軟正黑體"/>
-                <a:ea typeface="微軟正黑體"/>
-                <a:cs typeface="微軟正黑體"/>
-              </a:rPr>
-              <a:t>code＝步驟</a:t>
-            </a:r>
-            <a:r>
-              <a:rPr sz="1350" b="1" dirty="0">
-                <a:solidFill>
-                  <a:srgbClr val="333333"/>
-                </a:solidFill>
-                <a:latin typeface="微軟正黑體"/>
-                <a:ea typeface="微軟正黑體"/>
-                <a:cs typeface="微軟正黑體"/>
-              </a:rPr>
-              <a:t> 2</a:t>
-            </a:r>
-          </a:p>
-          <a:p>
-            <a:pPr>
-              <a:spcAft>
-                <a:spcPts val="1000"/>
-              </a:spcAft>
-            </a:pPr>
-            <a:r>
-              <a:rPr sz="1150" dirty="0">
-                <a:solidFill>
-                  <a:srgbClr val="757575"/>
-                </a:solidFill>
-                <a:latin typeface="微軟正黑體"/>
-                <a:ea typeface="微軟正黑體"/>
-                <a:cs typeface="微軟正黑體"/>
-              </a:rPr>
-              <a:t>     </a:t>
-            </a:r>
-            <a:r>
-              <a:rPr sz="1150" dirty="0" err="1">
-                <a:solidFill>
-                  <a:srgbClr val="757575"/>
-                </a:solidFill>
-                <a:latin typeface="微軟正黑體"/>
-                <a:ea typeface="微軟正黑體"/>
-                <a:cs typeface="微軟正黑體"/>
-              </a:rPr>
-              <a:t>用手機相機掃描，自動加入這台裝置的熱點</a:t>
-            </a:r>
-            <a:endParaRPr sz="1150" dirty="0">
-              <a:solidFill>
-                <a:srgbClr val="757575"/>
-              </a:solidFill>
-              <a:latin typeface="微軟正黑體"/>
-              <a:ea typeface="微軟正黑體"/>
-              <a:cs typeface="微軟正黑體"/>
-            </a:endParaRPr>
-          </a:p>
-          <a:p>
-            <a:pPr>
-              <a:spcAft>
-                <a:spcPts val="1000"/>
-              </a:spcAft>
-            </a:pPr>
-            <a:r>
-              <a:rPr sz="1350" b="1" dirty="0">
-                <a:solidFill>
-                  <a:srgbClr val="333333"/>
-                </a:solidFill>
-                <a:latin typeface="微軟正黑體"/>
-                <a:ea typeface="微軟正黑體"/>
-                <a:cs typeface="微軟正黑體"/>
-              </a:rPr>
-              <a:t>3  「2. </a:t>
-            </a:r>
-            <a:r>
-              <a:rPr sz="1350" b="1" dirty="0" err="1">
-                <a:solidFill>
-                  <a:srgbClr val="333333"/>
-                </a:solidFill>
-                <a:latin typeface="微軟正黑體"/>
-                <a:ea typeface="微軟正黑體"/>
-                <a:cs typeface="微軟正黑體"/>
-              </a:rPr>
-              <a:t>Setup」QR</a:t>
-            </a:r>
-            <a:r>
-              <a:rPr sz="1350" b="1" dirty="0">
-                <a:solidFill>
-                  <a:srgbClr val="333333"/>
-                </a:solidFill>
-                <a:latin typeface="微軟正黑體"/>
-                <a:ea typeface="微軟正黑體"/>
-                <a:cs typeface="微軟正黑體"/>
-              </a:rPr>
-              <a:t> </a:t>
-            </a:r>
-            <a:r>
-              <a:rPr sz="1350" b="1" dirty="0" err="1">
-                <a:solidFill>
-                  <a:srgbClr val="333333"/>
-                </a:solidFill>
-                <a:latin typeface="微軟正黑體"/>
-                <a:ea typeface="微軟正黑體"/>
-                <a:cs typeface="微軟正黑體"/>
-              </a:rPr>
-              <a:t>code＝步驟</a:t>
-            </a:r>
-            <a:r>
-              <a:rPr sz="1350" b="1" dirty="0">
-                <a:solidFill>
-                  <a:srgbClr val="333333"/>
-                </a:solidFill>
-                <a:latin typeface="微軟正黑體"/>
-                <a:ea typeface="微軟正黑體"/>
-                <a:cs typeface="微軟正黑體"/>
-              </a:rPr>
-              <a:t> 3</a:t>
-            </a:r>
-          </a:p>
-          <a:p>
-            <a:pPr>
-              <a:spcAft>
-                <a:spcPts val="1000"/>
-              </a:spcAft>
-            </a:pPr>
-            <a:r>
-              <a:rPr sz="1150" dirty="0">
-                <a:solidFill>
-                  <a:srgbClr val="757575"/>
-                </a:solidFill>
-                <a:latin typeface="微軟正黑體"/>
-                <a:ea typeface="微軟正黑體"/>
-                <a:cs typeface="微軟正黑體"/>
-              </a:rPr>
-              <a:t>     </a:t>
-            </a:r>
-            <a:r>
-              <a:rPr sz="1150" dirty="0" err="1">
-                <a:solidFill>
-                  <a:srgbClr val="757575"/>
-                </a:solidFill>
-                <a:latin typeface="微軟正黑體"/>
-                <a:ea typeface="微軟正黑體"/>
-                <a:cs typeface="微軟正黑體"/>
-              </a:rPr>
-              <a:t>掃了直接開啟設定頁網址（沒自動跳出設定頁時的備援方法</a:t>
-            </a:r>
-            <a:r>
-              <a:rPr sz="1150" dirty="0">
-                <a:solidFill>
-                  <a:srgbClr val="757575"/>
-                </a:solidFill>
-                <a:latin typeface="微軟正黑體"/>
-                <a:ea typeface="微軟正黑體"/>
-                <a:cs typeface="微軟正黑體"/>
-              </a:rPr>
-              <a:t>）；</a:t>
-            </a:r>
-          </a:p>
-          <a:p>
-            <a:pPr>
-              <a:spcAft>
-                <a:spcPts val="1000"/>
-              </a:spcAft>
-            </a:pPr>
-            <a:r>
-              <a:rPr sz="1150" dirty="0">
-                <a:solidFill>
-                  <a:srgbClr val="757575"/>
-                </a:solidFill>
-                <a:latin typeface="微軟正黑體"/>
-                <a:ea typeface="微軟正黑體"/>
-                <a:cs typeface="微軟正黑體"/>
-              </a:rPr>
-              <a:t>     </a:t>
-            </a:r>
-            <a:r>
-              <a:rPr sz="1150" dirty="0" err="1">
-                <a:solidFill>
-                  <a:srgbClr val="757575"/>
-                </a:solidFill>
-                <a:latin typeface="微軟正黑體"/>
-                <a:ea typeface="微軟正黑體"/>
-                <a:cs typeface="微軟正黑體"/>
-              </a:rPr>
-              <a:t>下方印的</a:t>
-            </a:r>
-            <a:r>
-              <a:rPr sz="1150" dirty="0">
-                <a:solidFill>
-                  <a:srgbClr val="757575"/>
-                </a:solidFill>
-                <a:latin typeface="微軟正黑體"/>
-                <a:ea typeface="微軟正黑體"/>
-                <a:cs typeface="微軟正黑體"/>
-              </a:rPr>
-              <a:t> 192.168.4.1 </a:t>
-            </a:r>
-            <a:r>
-              <a:rPr sz="1150" dirty="0" err="1">
-                <a:solidFill>
-                  <a:srgbClr val="757575"/>
-                </a:solidFill>
-                <a:latin typeface="微軟正黑體"/>
-                <a:ea typeface="微軟正黑體"/>
-                <a:cs typeface="微軟正黑體"/>
-              </a:rPr>
-              <a:t>是同一個網址，QR</a:t>
-            </a:r>
-            <a:r>
-              <a:rPr sz="1150" dirty="0">
-                <a:solidFill>
-                  <a:srgbClr val="757575"/>
-                </a:solidFill>
-                <a:latin typeface="微軟正黑體"/>
-                <a:ea typeface="微軟正黑體"/>
-                <a:cs typeface="微軟正黑體"/>
-              </a:rPr>
-              <a:t> </a:t>
-            </a:r>
-            <a:r>
-              <a:rPr sz="1150" dirty="0" err="1">
-                <a:solidFill>
-                  <a:srgbClr val="757575"/>
-                </a:solidFill>
-                <a:latin typeface="微軟正黑體"/>
-                <a:ea typeface="微軟正黑體"/>
-                <a:cs typeface="微軟正黑體"/>
-              </a:rPr>
-              <a:t>掃不了也能手動輸入</a:t>
-            </a:r>
-            <a:endParaRPr sz="1150" dirty="0">
-              <a:solidFill>
-                <a:srgbClr val="757575"/>
-              </a:solidFill>
-              <a:latin typeface="微軟正黑體"/>
-              <a:ea typeface="微軟正黑體"/>
-              <a:cs typeface="微軟正黑體"/>
-            </a:endParaRPr>
-          </a:p>
-        </p:txBody>
-      </p:sp>
-      <p:sp>
-        <p:nvSpPr>
           <p:cNvPr id="7" name="TextBox 6"/>
           <p:cNvSpPr txBox="1"/>
           <p:nvPr/>
@@ -5779,6 +5397,168 @@
                 <a:cs typeface="微軟正黑體"/>
               </a:rPr>
               <a:t>，螢幕上也看得到</a:t>
+            </a:r>
+          </a:p>
+        </p:txBody>
+      </p:sp>
+      <p:sp>
+        <p:nvSpPr>
+          <p:cNvPr id="10" name="TextBox 9"/>
+          <p:cNvSpPr txBox="1"/>
+          <p:nvPr/>
+        </p:nvSpPr>
+        <p:spPr>
+          <a:xfrm>
+            <a:off x="5760720" y="1234440"/>
+            <a:ext cx="2926080" cy="1249197"/>
+          </a:xfrm>
+          <a:prstGeom prst="rect">
+            <a:avLst/>
+          </a:prstGeom>
+          <a:noFill/>
+        </p:spPr>
+        <p:txBody>
+          <a:bodyPr wrap="square">
+            <a:spAutoFit/>
+          </a:bodyPr>
+          <a:lstStyle/>
+          <a:p>
+            <a:r>
+              <a:rPr sz="1500" b="1">
+                <a:solidFill>
+                  <a:srgbClr val="333333"/>
+                </a:solidFill>
+                <a:latin typeface="微軟正黑體"/>
+                <a:ea typeface="微軟正黑體"/>
+                <a:cs typeface="微軟正黑體"/>
+              </a:rPr>
+              <a:t>•  Wi-Fi 名稱／密碼／個案身份證字號（供核對用）</a:t>
+            </a:r>
+          </a:p>
+          <a:p>
+            <a:pPr>
+              <a:spcBef>
+                <a:spcPts val="200"/>
+              </a:spcBef>
+            </a:pPr>
+            <a:r>
+              <a:rPr sz="1200" b="0">
+                <a:solidFill>
+                  <a:srgbClr val="757575"/>
+                </a:solidFill>
+                <a:latin typeface="微軟正黑體"/>
+                <a:ea typeface="微軟正黑體"/>
+                <a:cs typeface="微軟正黑體"/>
+              </a:rPr>
+              <a:t>     黑底白字是欄位名稱，下面才是實際的值</a:t>
+            </a:r>
+          </a:p>
+        </p:txBody>
+      </p:sp>
+      <p:sp>
+        <p:nvSpPr>
+          <p:cNvPr id="11" name="TextBox 10"/>
+          <p:cNvSpPr txBox="1"/>
+          <p:nvPr/>
+        </p:nvSpPr>
+        <p:spPr>
+          <a:xfrm>
+            <a:off x="5760720" y="2575077"/>
+            <a:ext cx="2926080" cy="3871443"/>
+          </a:xfrm>
+          <a:prstGeom prst="rect">
+            <a:avLst/>
+          </a:prstGeom>
+          <a:noFill/>
+        </p:spPr>
+        <p:txBody>
+          <a:bodyPr wrap="square">
+            <a:spAutoFit/>
+          </a:bodyPr>
+          <a:lstStyle/>
+          <a:p>
+            <a:r>
+              <a:rPr sz="1500" b="1">
+                <a:solidFill>
+                  <a:srgbClr val="333333"/>
+                </a:solidFill>
+                <a:latin typeface="微軟正黑體"/>
+                <a:ea typeface="微軟正黑體"/>
+                <a:cs typeface="微軟正黑體"/>
+              </a:rPr>
+              <a:t>步驟 2：「1. Join WiFi」QR code</a:t>
+            </a:r>
+          </a:p>
+          <a:p>
+            <a:pPr>
+              <a:spcBef>
+                <a:spcPts val="200"/>
+              </a:spcBef>
+            </a:pPr>
+            <a:r>
+              <a:rPr sz="1200" b="0">
+                <a:solidFill>
+                  <a:srgbClr val="757575"/>
+                </a:solidFill>
+                <a:latin typeface="微軟正黑體"/>
+                <a:ea typeface="微軟正黑體"/>
+                <a:cs typeface="微軟正黑體"/>
+              </a:rPr>
+              <a:t>     用手機相機掃描，自動加入這台裝置的熱點</a:t>
+            </a:r>
+          </a:p>
+          <a:p>
+            <a:pPr>
+              <a:spcBef>
+                <a:spcPts val="1000"/>
+              </a:spcBef>
+            </a:pPr>
+            <a:r>
+              <a:rPr sz="1500" b="1">
+                <a:solidFill>
+                  <a:srgbClr val="333333"/>
+                </a:solidFill>
+                <a:latin typeface="微軟正黑體"/>
+                <a:ea typeface="微軟正黑體"/>
+                <a:cs typeface="微軟正黑體"/>
+              </a:rPr>
+              <a:t>步驟 3：「2. Setup」QR code</a:t>
+            </a:r>
+          </a:p>
+          <a:p>
+            <a:pPr>
+              <a:spcBef>
+                <a:spcPts val="200"/>
+              </a:spcBef>
+            </a:pPr>
+            <a:r>
+              <a:rPr sz="1200" b="0">
+                <a:solidFill>
+                  <a:srgbClr val="757575"/>
+                </a:solidFill>
+                <a:latin typeface="微軟正黑體"/>
+                <a:ea typeface="微軟正黑體"/>
+                <a:cs typeface="微軟正黑體"/>
+              </a:rPr>
+              <a:t>     掃了直接開啟設定頁網址（沒自動跳出設定頁時的備援方法）；</a:t>
+            </a:r>
+          </a:p>
+          <a:p>
+            <a:pPr>
+              <a:spcBef>
+                <a:spcPts val="200"/>
+              </a:spcBef>
+            </a:pPr>
+            <a:r>
+              <a:rPr sz="1200" b="0">
+                <a:solidFill>
+                  <a:srgbClr val="757575"/>
+                </a:solidFill>
+                <a:latin typeface="微軟正黑體"/>
+                <a:ea typeface="微軟正黑體"/>
+                <a:cs typeface="微軟正黑體"/>
+              </a:rPr>
+              <a:t>     下方印的 192.168.4.1 是同一個網址，QR 掃不了也能手動輸入</a:t>
             </a:r>
           </a:p>
         </p:txBody>
@@ -7162,7 +6942,7 @@
       </p:sp>
       <p:pic>
         <p:nvPicPr>
-          <p:cNvPr id="3" name="Picture 2" descr="screen_mockup_photo.png"/>
+          <p:cNvPr id="11" name="Picture 10" descr="image.png"/>
           <p:cNvPicPr>
             <a:picLocks noChangeAspect="1"/>
           </p:cNvPicPr>
@@ -7284,7 +7064,7 @@
       </p:sp>
       <p:pic>
         <p:nvPicPr>
-          <p:cNvPr id="7" name="Picture 6" descr="screen_upload_failed.png"/>
+          <p:cNvPr id="12" name="Picture 11" descr="image.png"/>
           <p:cNvPicPr>
             <a:picLocks noChangeAspect="1"/>
           </p:cNvPicPr>
@@ -7338,7 +7118,7 @@
                 <a:ea typeface="微軟正黑體"/>
                 <a:cs typeface="微軟正黑體"/>
               </a:rPr>
-              <a:t>③ 上傳中／成功／失敗</a:t>
+              <a:t>③ 上傳中／完成／發生錯誤（ERROR 畫面）</a:t>
             </a:r>
           </a:p>
         </p:txBody>
@@ -7477,7 +7257,7 @@
         <p:spPr>
           <a:xfrm>
             <a:off x="1417320" y="1206903"/>
-            <a:ext cx="6309360" cy="3118314"/>
+            <a:ext cx="5236768" cy="2588200"/>
           </a:xfrm>
           <a:prstGeom prst="rect">
             <a:avLst/>
@@ -7492,8 +7272,8 @@
         </p:nvSpPr>
         <p:spPr>
           <a:xfrm>
-            <a:off x="1973782" y="1820928"/>
-            <a:ext cx="237744" cy="237744"/>
+            <a:off x="1879183" y="1716543"/>
+            <a:ext cx="197327" cy="197327"/>
           </a:xfrm>
           <a:prstGeom prst="ellipse">
             <a:avLst/>
@@ -7526,7 +7306,7 @@
           <a:p>
             <a:pPr algn="ctr"/>
             <a:r>
-              <a:rPr sz="1000" b="1">
+              <a:rPr sz="829" b="1">
                 <a:solidFill>
                   <a:srgbClr val="FFFFFF"/>
                 </a:solidFill>
@@ -7547,8 +7327,8 @@
         </p:nvSpPr>
         <p:spPr>
           <a:xfrm>
-            <a:off x="1973782" y="2062984"/>
-            <a:ext cx="237744" cy="237744"/>
+            <a:off x="1879183" y="1917450"/>
+            <a:ext cx="197327" cy="197327"/>
           </a:xfrm>
           <a:prstGeom prst="ellipse">
             <a:avLst/>
@@ -7581,7 +7361,7 @@
           <a:p>
             <a:pPr algn="ctr"/>
             <a:r>
-              <a:rPr sz="1000" b="1">
+              <a:rPr sz="829" b="1">
                 <a:solidFill>
                   <a:srgbClr val="FFFFFF"/>
                 </a:solidFill>
@@ -7602,8 +7382,8 @@
         </p:nvSpPr>
         <p:spPr>
           <a:xfrm>
-            <a:off x="1973782" y="2305040"/>
-            <a:ext cx="237744" cy="237744"/>
+            <a:off x="1879183" y="2118356"/>
+            <a:ext cx="197327" cy="197327"/>
           </a:xfrm>
           <a:prstGeom prst="ellipse">
             <a:avLst/>
@@ -7636,7 +7416,7 @@
           <a:p>
             <a:pPr algn="ctr"/>
             <a:r>
-              <a:rPr sz="1000" b="1">
+              <a:rPr sz="829" b="1">
                 <a:solidFill>
                   <a:srgbClr val="FFFFFF"/>
                 </a:solidFill>
@@ -7657,8 +7437,8 @@
         </p:nvSpPr>
         <p:spPr>
           <a:xfrm>
-            <a:off x="1973782" y="2547096"/>
-            <a:ext cx="237744" cy="237744"/>
+            <a:off x="1879183" y="2319263"/>
+            <a:ext cx="197327" cy="197327"/>
           </a:xfrm>
           <a:prstGeom prst="ellipse">
             <a:avLst/>
@@ -7691,7 +7471,7 @@
           <a:p>
             <a:pPr algn="ctr"/>
             <a:r>
-              <a:rPr sz="1000" b="1">
+              <a:rPr sz="829" b="1">
                 <a:solidFill>
                   <a:srgbClr val="FFFFFF"/>
                 </a:solidFill>
@@ -7712,8 +7492,8 @@
         </p:nvSpPr>
         <p:spPr>
           <a:xfrm>
-            <a:off x="1973782" y="2789151"/>
-            <a:ext cx="237744" cy="237744"/>
+            <a:off x="1879183" y="2520168"/>
+            <a:ext cx="197327" cy="197327"/>
           </a:xfrm>
           <a:prstGeom prst="ellipse">
             <a:avLst/>
@@ -7746,7 +7526,7 @@
           <a:p>
             <a:pPr algn="ctr"/>
             <a:r>
-              <a:rPr sz="1000" b="1">
+              <a:rPr sz="829" b="1">
                 <a:solidFill>
                   <a:srgbClr val="FFFFFF"/>
                 </a:solidFill>
@@ -7767,8 +7547,8 @@
         </p:nvSpPr>
         <p:spPr>
           <a:xfrm>
-            <a:off x="1973782" y="3031207"/>
-            <a:ext cx="237744" cy="237744"/>
+            <a:off x="1879183" y="2721075"/>
+            <a:ext cx="197327" cy="197327"/>
           </a:xfrm>
           <a:prstGeom prst="ellipse">
             <a:avLst/>
@@ -7801,7 +7581,7 @@
           <a:p>
             <a:pPr algn="ctr"/>
             <a:r>
-              <a:rPr sz="1000" b="1">
+              <a:rPr sz="829" b="1">
                 <a:solidFill>
                   <a:srgbClr val="FFFFFF"/>
                 </a:solidFill>
@@ -7822,8 +7602,8 @@
         </p:nvSpPr>
         <p:spPr>
           <a:xfrm>
-            <a:off x="1973782" y="3273263"/>
-            <a:ext cx="237744" cy="237744"/>
+            <a:off x="1879183" y="2921981"/>
+            <a:ext cx="197327" cy="197327"/>
           </a:xfrm>
           <a:prstGeom prst="ellipse">
             <a:avLst/>
@@ -7856,7 +7636,7 @@
           <a:p>
             <a:pPr algn="ctr"/>
             <a:r>
-              <a:rPr sz="1000" b="1">
+              <a:rPr sz="829" b="1">
                 <a:solidFill>
                   <a:srgbClr val="FFFFFF"/>
                 </a:solidFill>
@@ -7877,8 +7657,8 @@
         </p:nvSpPr>
         <p:spPr>
           <a:xfrm>
-            <a:off x="1973782" y="3515319"/>
-            <a:ext cx="237744" cy="237744"/>
+            <a:off x="1879183" y="3122888"/>
+            <a:ext cx="197327" cy="197327"/>
           </a:xfrm>
           <a:prstGeom prst="ellipse">
             <a:avLst/>
@@ -7911,7 +7691,7 @@
           <a:p>
             <a:pPr algn="ctr"/>
             <a:r>
-              <a:rPr sz="1000" b="1">
+              <a:rPr sz="829" b="1">
                 <a:solidFill>
                   <a:srgbClr val="FFFFFF"/>
                 </a:solidFill>
@@ -8213,7 +7993,7 @@
                 <a:ea typeface="微軟正黑體"/>
                 <a:cs typeface="微軟正黑體"/>
               </a:rPr>
-              <a:t>血糖（依來源標註 D40 或 MD6</a:t>
+              <a:t>血糖（依來源標註 D40／MD6／GM</a:t>
             </a:r>
             <a:r>
               <a:rPr sz="1150" b="1" dirty="0">
@@ -8424,6 +8204,171 @@
           </a:p>
         </p:txBody>
       </p:sp>
+      <p:graphicFrame>
+        <p:nvGraphicFramePr>
+          <p:cNvPr id="17" name="Table 16"/>
+          <p:cNvGraphicFramePr>
+            <a:graphicFrameLocks noGrp="1"/>
+          </p:cNvGraphicFramePr>
+          <p:nvPr/>
+        </p:nvGraphicFramePr>
+        <p:xfrm>
+          <a:off x="457200" y="3855103"/>
+          <a:ext cx="8229600" cy="620000"/>
+        </p:xfrm>
+        <a:graphic>
+          <a:graphicData uri="http://schemas.openxmlformats.org/drawingml/2006/table">
+            <a:tbl>
+              <a:tblPr firstRow="1" bandRow="1">
+                <a:tableStyleId>{5C22544A-7EE6-4342-B048-85BDC9FD1C3A}</a:tableStyleId>
+              </a:tblPr>
+              <a:tblGrid>
+                <a:gridCol w="2400000"/>
+                <a:gridCol w="5829600"/>
+              </a:tblGrid>
+              <a:tr h="206666">
+                <a:tc>
+                  <a:txBody>
+                    <a:bodyPr wrap="square"/>
+                    <a:lstStyle/>
+                    <a:p>
+                      <a:r>
+                        <a:rPr sz="1100" b="1">
+                          <a:solidFill>
+                            <a:srgbClr val="134349"/>
+                          </a:solidFill>
+                          <a:latin typeface="微軟正黑體"/>
+                          <a:ea typeface="微軟正黑體"/>
+                          <a:cs typeface="微軟正黑體"/>
+                        </a:rPr>
+                        <a:t>裝置</a:t>
+                      </a:r>
+                    </a:p>
+                  </a:txBody>
+                  <a:tcPr/>
+                </a:tc>
+                <a:tc>
+                  <a:txBody>
+                    <a:bodyPr wrap="square"/>
+                    <a:lstStyle/>
+                    <a:p>
+                      <a:r>
+                        <a:rPr sz="1100" b="1">
+                          <a:solidFill>
+                            <a:srgbClr val="134349"/>
+                          </a:solidFill>
+                          <a:latin typeface="微軟正黑體"/>
+                          <a:ea typeface="微軟正黑體"/>
+                          <a:cs typeface="微軟正黑體"/>
+                        </a:rPr>
+                        <a:t>時間來源</a:t>
+                      </a:r>
+                    </a:p>
+                  </a:txBody>
+                  <a:tcPr/>
+                </a:tc>
+              </a:tr>
+              <a:tr h="206666">
+                <a:tc>
+                  <a:txBody>
+                    <a:bodyPr wrap="square"/>
+                    <a:lstStyle/>
+                    <a:p>
+                      <a:r>
+                        <a:rPr sz="1000" b="0">
+                          <a:solidFill>
+                            <a:srgbClr val="333333"/>
+                          </a:solidFill>
+                          <a:latin typeface="微軟正黑體"/>
+                          <a:ea typeface="微軟正黑體"/>
+                          <a:cs typeface="微軟正黑體"/>
+                        </a:rPr>
+                        <a:t>額溫槍／血氧計</a:t>
+                      </a:r>
+                    </a:p>
+                  </a:txBody>
+                  <a:tcPr/>
+                </a:tc>
+                <a:tc>
+                  <a:txBody>
+                    <a:bodyPr wrap="square"/>
+                    <a:lstStyle/>
+                    <a:p>
+                      <a:r>
+                        <a:rPr sz="1000" b="0">
+                          <a:solidFill>
+                            <a:srgbClr val="333333"/>
+                          </a:solidFill>
+                          <a:latin typeface="微軟正黑體"/>
+                          <a:ea typeface="微軟正黑體"/>
+                          <a:cs typeface="微軟正黑體"/>
+                        </a:rPr>
+                        <a:t>中繼器收到時間</a:t>
+                      </a:r>
+                    </a:p>
+                  </a:txBody>
+                  <a:tcPr/>
+                </a:tc>
+              </a:tr>
+              <a:tr h="206668">
+                <a:tc>
+                  <a:txBody>
+                    <a:bodyPr wrap="square"/>
+                    <a:lstStyle/>
+                    <a:p>
+                      <a:r>
+                        <a:rPr sz="1000" b="0">
+                          <a:solidFill>
+                            <a:srgbClr val="333333"/>
+                          </a:solidFill>
+                          <a:latin typeface="微軟正黑體"/>
+                          <a:ea typeface="微軟正黑體"/>
+                          <a:cs typeface="微軟正黑體"/>
+                        </a:rPr>
+                        <a:t>血壓計／六合一／血糖機</a:t>
+                      </a:r>
+                    </a:p>
+                  </a:txBody>
+                  <a:tcPr/>
+                </a:tc>
+                <a:tc>
+                  <a:txBody>
+                    <a:bodyPr wrap="square"/>
+                    <a:lstStyle/>
+                    <a:p>
+                      <a:r>
+                        <a:rPr sz="1000" b="0">
+                          <a:solidFill>
+                            <a:srgbClr val="333333"/>
+                          </a:solidFill>
+                          <a:latin typeface="微軟正黑體"/>
+                          <a:ea typeface="微軟正黑體"/>
+                          <a:cs typeface="微軟正黑體"/>
+                        </a:rPr>
+                        <a:t>1. 優先用裝置自己的量測時間</a:t>
+                      </a:r>
+                    </a:p>
+                    <a:p>
+                      <a:r>
+                        <a:rPr sz="1000" b="0">
+                          <a:solidFill>
+                            <a:srgbClr val="333333"/>
+                          </a:solidFill>
+                          <a:latin typeface="微軟正黑體"/>
+                          <a:ea typeface="微軟正黑體"/>
+                          <a:cs typeface="微軟正黑體"/>
+                        </a:rPr>
+                        <a:t>2. 差超過 7 天，改用中繼器收到時間</a:t>
+                      </a:r>
+                    </a:p>
+                  </a:txBody>
+                  <a:tcPr/>
+                </a:tc>
+              </a:tr>
+            </a:tbl>
+          </a:graphicData>
+        </a:graphic>
+      </p:graphicFrame>
     </p:spTree>
   </p:cSld>
   <p:clrMapOvr>
@@ -8572,8 +8517,8 @@
         </p:nvSpPr>
         <p:spPr>
           <a:xfrm>
-            <a:off x="1585376" y="1594520"/>
-            <a:ext cx="560000" cy="560000"/>
+            <a:off x="1815153" y="1706508"/>
+            <a:ext cx="289280" cy="316167"/>
           </a:xfrm>
           <a:prstGeom prst="ellipse">
             <a:avLst/>
@@ -8648,7 +8593,7 @@
           </a:fontRef>
         </p:style>
         <p:txBody>
-          <a:bodyPr rtlCol="0" anchor="ctr" wrap="square" lIns="560000" rIns="180000" tIns="120000"/>
+          <a:bodyPr wrap="square" lIns="560000" tIns="120000" rIns="180000" rtlCol="0" anchor="ctr"/>
           <a:lstStyle/>
           <a:p>
             <a:pPr algn="ctr"/>
@@ -8721,7 +8666,7 @@
           </a:fontRef>
         </p:style>
         <p:txBody>
-          <a:bodyPr rtlCol="0" anchor="ctr" lIns="0" rIns="0" tIns="0" bIns="0"/>
+          <a:bodyPr lIns="0" tIns="0" rIns="0" bIns="0" rtlCol="0" anchor="ctr"/>
           <a:lstStyle/>
           <a:p>
             <a:pPr algn="ctr"/>
@@ -8778,7 +8723,7 @@
           </a:fontRef>
         </p:style>
         <p:txBody>
-          <a:bodyPr rtlCol="0" anchor="ctr" wrap="square" lIns="560000" rIns="180000" tIns="120000"/>
+          <a:bodyPr wrap="square" lIns="560000" tIns="120000" rIns="180000" rtlCol="0" anchor="ctr"/>
           <a:lstStyle/>
           <a:p>
             <a:pPr algn="ctr"/>
@@ -8851,7 +8796,7 @@
           </a:fontRef>
         </p:style>
         <p:txBody>
-          <a:bodyPr rtlCol="0" anchor="ctr" lIns="0" rIns="0" tIns="0" bIns="0"/>
+          <a:bodyPr lIns="0" tIns="0" rIns="0" bIns="0" rtlCol="0" anchor="ctr"/>
           <a:lstStyle/>
           <a:p>
             <a:pPr algn="ctr"/>
@@ -8908,7 +8853,7 @@
           </a:fontRef>
         </p:style>
         <p:txBody>
-          <a:bodyPr rtlCol="0" anchor="ctr" wrap="square" lIns="560000" rIns="180000" tIns="120000"/>
+          <a:bodyPr wrap="square" lIns="560000" tIns="120000" rIns="180000" rtlCol="0" anchor="ctr"/>
           <a:lstStyle/>
           <a:p>
             <a:pPr algn="ctr"/>
@@ -8981,7 +8926,7 @@
           </a:fontRef>
         </p:style>
         <p:txBody>
-          <a:bodyPr rtlCol="0" anchor="ctr" lIns="0" rIns="0" tIns="0" bIns="0"/>
+          <a:bodyPr lIns="0" tIns="0" rIns="0" bIns="0" rtlCol="0" anchor="ctr"/>
           <a:lstStyle/>
           <a:p>
             <a:pPr algn="ctr"/>
@@ -9038,7 +8983,7 @@
           </a:fontRef>
         </p:style>
         <p:txBody>
-          <a:bodyPr rtlCol="0" anchor="ctr" wrap="square" lIns="560000" rIns="180000" tIns="120000"/>
+          <a:bodyPr wrap="square" lIns="560000" tIns="120000" rIns="180000" rtlCol="0" anchor="ctr"/>
           <a:lstStyle/>
           <a:p>
             <a:pPr algn="ctr"/>
@@ -9111,7 +9056,7 @@
           </a:fontRef>
         </p:style>
         <p:txBody>
-          <a:bodyPr rtlCol="0" anchor="ctr" lIns="0" rIns="0" tIns="0" bIns="0"/>
+          <a:bodyPr lIns="0" tIns="0" rIns="0" bIns="0" rtlCol="0" anchor="ctr"/>
           <a:lstStyle/>
           <a:p>
             <a:pPr algn="ctr"/>
@@ -9325,7 +9270,7 @@
           </a:fontRef>
         </p:style>
         <p:txBody>
-          <a:bodyPr rtlCol="0" anchor="ctr" wrap="square" lIns="560000" rIns="180000" tIns="120000"/>
+          <a:bodyPr wrap="square" lIns="560000" tIns="120000" rIns="180000" rtlCol="0" anchor="ctr"/>
           <a:lstStyle/>
           <a:p>
             <a:pPr algn="ctr"/>
@@ -9398,7 +9343,7 @@
           </a:fontRef>
         </p:style>
         <p:txBody>
-          <a:bodyPr rtlCol="0" anchor="ctr" lIns="0" rIns="0" tIns="0" bIns="0"/>
+          <a:bodyPr lIns="0" tIns="0" rIns="0" bIns="0" rtlCol="0" anchor="ctr"/>
           <a:lstStyle/>
           <a:p>
             <a:pPr algn="ctr"/>
@@ -9455,7 +9400,7 @@
           </a:fontRef>
         </p:style>
         <p:txBody>
-          <a:bodyPr rtlCol="0" anchor="ctr" wrap="square" lIns="560000" rIns="180000" tIns="120000"/>
+          <a:bodyPr wrap="square" lIns="560000" tIns="120000" rIns="180000" rtlCol="0" anchor="ctr"/>
           <a:lstStyle/>
           <a:p>
             <a:pPr algn="ctr"/>
@@ -9528,7 +9473,7 @@
           </a:fontRef>
         </p:style>
         <p:txBody>
-          <a:bodyPr rtlCol="0" anchor="ctr" lIns="0" rIns="0" tIns="0" bIns="0"/>
+          <a:bodyPr lIns="0" tIns="0" rIns="0" bIns="0" rtlCol="0" anchor="ctr"/>
           <a:lstStyle/>
           <a:p>
             <a:pPr algn="ctr"/>
@@ -9585,7 +9530,7 @@
           </a:fontRef>
         </p:style>
         <p:txBody>
-          <a:bodyPr rtlCol="0" anchor="ctr" wrap="square" lIns="560000" rIns="180000" tIns="120000"/>
+          <a:bodyPr wrap="square" lIns="560000" tIns="120000" rIns="180000" rtlCol="0" anchor="ctr"/>
           <a:lstStyle/>
           <a:p>
             <a:pPr algn="ctr"/>
@@ -9616,7 +9561,7 @@
                 <a:ea typeface="微軟正黑體"/>
                 <a:cs typeface="微軟正黑體"/>
               </a:rPr>
-              <a:t>需要滿 30 秒數值穩定後才正式記錄一筆，避免抓到還在跳動的數字</a:t>
+              <a:t>持續觀察 30 秒（比照臨床等待讀數穩定的慣例），期間只保留最新數值，滿 30 秒才正式記錄一筆</a:t>
             </a:r>
           </a:p>
         </p:txBody>
@@ -9658,7 +9603,7 @@
           </a:fontRef>
         </p:style>
         <p:txBody>
-          <a:bodyPr rtlCol="0" anchor="ctr" lIns="0" rIns="0" tIns="0" bIns="0"/>
+          <a:bodyPr lIns="0" tIns="0" rIns="0" bIns="0" rtlCol="0" anchor="ctr"/>
           <a:lstStyle/>
           <a:p>
             <a:pPr algn="ctr"/>
@@ -9715,7 +9660,7 @@
           </a:fontRef>
         </p:style>
         <p:txBody>
-          <a:bodyPr rtlCol="0" anchor="ctr" wrap="square" lIns="560000" rIns="180000" tIns="120000"/>
+          <a:bodyPr wrap="square" lIns="560000" tIns="120000" rIns="180000" rtlCol="0" anchor="ctr"/>
           <a:lstStyle/>
           <a:p>
             <a:pPr algn="ctr"/>
@@ -9728,7 +9673,7 @@
                 <a:ea typeface="微軟正黑體"/>
                 <a:cs typeface="微軟正黑體"/>
               </a:rPr>
-              <a:t>手指移開後裝置約 15 秒內關機</a:t>
+              <a:t>記錄完成後 90 秒內不會開始新一輪觀察</a:t>
             </a:r>
           </a:p>
           <a:p>
@@ -9746,7 +9691,7 @@
                 <a:ea typeface="微軟正黑體"/>
                 <a:cs typeface="微軟正黑體"/>
               </a:rPr>
-              <a:t>窗口較短，記得量測時中繼器要在附近，避免量完手指一放開就來不及被抓到</a:t>
+              <a:t>避免剛記錄完又立刻重新觀察；手指移開後裝置本身也會在約 15 秒內自動關機</a:t>
             </a:r>
           </a:p>
         </p:txBody>
@@ -9788,7 +9733,7 @@
           </a:fontRef>
         </p:style>
         <p:txBody>
-          <a:bodyPr rtlCol="0" anchor="ctr" lIns="0" rIns="0" tIns="0" bIns="0"/>
+          <a:bodyPr lIns="0" tIns="0" rIns="0" bIns="0" rtlCol="0" anchor="ctr"/>
           <a:lstStyle/>
           <a:p>
             <a:pPr algn="ctr"/>
@@ -9913,7 +9858,7 @@
                 <a:ea typeface="微軟正黑體"/>
                 <a:cs typeface="微軟正黑體"/>
               </a:rPr>
-              <a:t>藍牙圖示：螢幕右上角，裝置型號旁的小圖示</a:t>
+              <a:t>訊號塔圖示：螢幕右上角，裝置型號旁</a:t>
             </a:r>
             <a:endParaRPr sz="1200" b="0" dirty="0">
               <a:solidFill>
@@ -9933,9 +9878,9 @@
           <p:nvPr/>
         </p:nvSpPr>
         <p:spPr>
-          <a:xfrm>
-            <a:off x="2741916" y="2319006"/>
-            <a:ext cx="500000" cy="500000"/>
+          <a:xfrm flipH="1">
+            <a:off x="2859777" y="2400868"/>
+            <a:ext cx="265559" cy="265559"/>
           </a:xfrm>
           <a:prstGeom prst="ellipse">
             <a:avLst/>
@@ -10010,7 +9955,7 @@
           </a:fontRef>
         </p:style>
         <p:txBody>
-          <a:bodyPr rtlCol="0" anchor="ctr" wrap="square" lIns="560000" rIns="180000" tIns="120000"/>
+          <a:bodyPr wrap="square" lIns="560000" tIns="120000" rIns="180000" rtlCol="0" anchor="ctr"/>
           <a:lstStyle/>
           <a:p>
             <a:pPr algn="ctr"/>
@@ -10083,7 +10028,7 @@
           </a:fontRef>
         </p:style>
         <p:txBody>
-          <a:bodyPr rtlCol="0" anchor="ctr" lIns="0" rIns="0" tIns="0" bIns="0"/>
+          <a:bodyPr lIns="0" tIns="0" rIns="0" bIns="0" rtlCol="0" anchor="ctr"/>
           <a:lstStyle/>
           <a:p>
             <a:pPr algn="ctr"/>
@@ -10140,7 +10085,7 @@
           </a:fontRef>
         </p:style>
         <p:txBody>
-          <a:bodyPr rtlCol="0" anchor="ctr" wrap="square" lIns="560000" rIns="180000" tIns="120000"/>
+          <a:bodyPr wrap="square" lIns="560000" tIns="120000" rIns="180000" rtlCol="0" anchor="ctr"/>
           <a:lstStyle/>
           <a:p>
             <a:pPr algn="ctr"/>
@@ -10171,7 +10116,7 @@
                 <a:ea typeface="微軟正黑體"/>
                 <a:cs typeface="微軟正黑體"/>
               </a:rPr>
-              <a:t>量測完成後才會開啟藍牙（螢幕出現藍牙圖示，如左圖）</a:t>
+              <a:t>量測完成後才會開啟藍牙（螢幕右上角的訊號塔圖示會亮起，如左圖）</a:t>
             </a:r>
           </a:p>
         </p:txBody>
@@ -10213,7 +10158,7 @@
           </a:fontRef>
         </p:style>
         <p:txBody>
-          <a:bodyPr rtlCol="0" anchor="ctr" lIns="0" rIns="0" tIns="0" bIns="0"/>
+          <a:bodyPr lIns="0" tIns="0" rIns="0" bIns="0" rtlCol="0" anchor="ctr"/>
           <a:lstStyle/>
           <a:p>
             <a:pPr algn="ctr"/>
@@ -10270,7 +10215,7 @@
           </a:fontRef>
         </p:style>
         <p:txBody>
-          <a:bodyPr rtlCol="0" anchor="ctr" wrap="square" lIns="560000" rIns="180000" tIns="120000"/>
+          <a:bodyPr wrap="square" lIns="560000" tIns="120000" rIns="180000" rtlCol="0" anchor="ctr"/>
           <a:lstStyle/>
           <a:p>
             <a:pPr algn="ctr"/>
@@ -10343,7 +10288,7 @@
           </a:fontRef>
         </p:style>
         <p:txBody>
-          <a:bodyPr rtlCol="0" anchor="ctr" lIns="0" rIns="0" tIns="0" bIns="0"/>
+          <a:bodyPr lIns="0" tIns="0" rIns="0" bIns="0" rtlCol="0" anchor="ctr"/>
           <a:lstStyle/>
           <a:p>
             <a:pPr algn="ctr"/>
@@ -10400,7 +10345,7 @@
           </a:fontRef>
         </p:style>
         <p:txBody>
-          <a:bodyPr rtlCol="0" anchor="ctr" wrap="square" lIns="560000" rIns="180000" tIns="120000"/>
+          <a:bodyPr wrap="square" lIns="560000" tIns="120000" rIns="180000" rtlCol="0" anchor="ctr"/>
           <a:lstStyle/>
           <a:p>
             <a:pPr algn="ctr"/>
@@ -10473,7 +10418,7 @@
           </a:fontRef>
         </p:style>
         <p:txBody>
-          <a:bodyPr rtlCol="0" anchor="ctr" lIns="0" rIns="0" tIns="0" bIns="0"/>
+          <a:bodyPr lIns="0" tIns="0" rIns="0" bIns="0" rtlCol="0" anchor="ctr"/>
           <a:lstStyle/>
           <a:p>
             <a:pPr algn="ctr"/>
@@ -10687,7 +10632,7 @@
           </a:fontRef>
         </p:style>
         <p:txBody>
-          <a:bodyPr rtlCol="0" anchor="ctr" wrap="square" lIns="560000" rIns="180000" tIns="120000"/>
+          <a:bodyPr wrap="square" lIns="560000" tIns="120000" rIns="180000" rtlCol="0" anchor="ctr"/>
           <a:lstStyle/>
           <a:p>
             <a:pPr algn="ctr"/>
@@ -10760,7 +10705,7 @@
           </a:fontRef>
         </p:style>
         <p:txBody>
-          <a:bodyPr rtlCol="0" anchor="ctr" lIns="0" rIns="0" tIns="0" bIns="0"/>
+          <a:bodyPr lIns="0" tIns="0" rIns="0" bIns="0" rtlCol="0" anchor="ctr"/>
           <a:lstStyle/>
           <a:p>
             <a:pPr algn="ctr"/>
@@ -10817,7 +10762,7 @@
           </a:fontRef>
         </p:style>
         <p:txBody>
-          <a:bodyPr rtlCol="0" anchor="ctr" wrap="square" lIns="560000" rIns="180000" tIns="120000"/>
+          <a:bodyPr wrap="square" lIns="560000" tIns="120000" rIns="180000" rtlCol="0" anchor="ctr"/>
           <a:lstStyle/>
           <a:p>
             <a:pPr algn="ctr"/>
@@ -10890,7 +10835,7 @@
           </a:fontRef>
         </p:style>
         <p:txBody>
-          <a:bodyPr rtlCol="0" anchor="ctr" lIns="0" rIns="0" tIns="0" bIns="0"/>
+          <a:bodyPr lIns="0" tIns="0" rIns="0" bIns="0" rtlCol="0" anchor="ctr"/>
           <a:lstStyle/>
           <a:p>
             <a:pPr algn="ctr"/>
@@ -10947,7 +10892,7 @@
           </a:fontRef>
         </p:style>
         <p:txBody>
-          <a:bodyPr rtlCol="0" anchor="ctr" wrap="square" lIns="560000" rIns="180000" tIns="120000"/>
+          <a:bodyPr wrap="square" lIns="560000" tIns="120000" rIns="180000" rtlCol="0" anchor="ctr"/>
           <a:lstStyle/>
           <a:p>
             <a:pPr algn="ctr"/>
@@ -11020,7 +10965,7 @@
           </a:fontRef>
         </p:style>
         <p:txBody>
-          <a:bodyPr rtlCol="0" anchor="ctr" lIns="0" rIns="0" tIns="0" bIns="0"/>
+          <a:bodyPr lIns="0" tIns="0" rIns="0" bIns="0" rtlCol="0" anchor="ctr"/>
           <a:lstStyle/>
           <a:p>
             <a:pPr algn="ctr"/>
@@ -11077,7 +11022,7 @@
           </a:fontRef>
         </p:style>
         <p:txBody>
-          <a:bodyPr rtlCol="0" anchor="ctr" wrap="square" lIns="560000" rIns="180000" tIns="120000"/>
+          <a:bodyPr wrap="square" lIns="560000" tIns="120000" rIns="180000" rtlCol="0" anchor="ctr"/>
           <a:lstStyle/>
           <a:p>
             <a:pPr algn="ctr"/>
@@ -11150,7 +11095,7 @@
           </a:fontRef>
         </p:style>
         <p:txBody>
-          <a:bodyPr rtlCol="0" anchor="ctr" lIns="0" rIns="0" tIns="0" bIns="0"/>
+          <a:bodyPr lIns="0" tIns="0" rIns="0" bIns="0" rtlCol="0" anchor="ctr"/>
           <a:lstStyle/>
           <a:p>
             <a:pPr algn="ctr"/>
@@ -12033,7 +11978,7 @@
 </file>
 
 <file path=ppt/slides/slide20.xml><?xml version="1.0" encoding="utf-8"?>
-<p:sld xmlns:a="http://schemas.openxmlformats.org/drawingml/2006/main" xmlns:p="http://schemas.openxmlformats.org/presentationml/2006/main" xmlns:r="http://schemas.openxmlformats.org/officeDocument/2006/relationships">
+<p:sld xmlns:a="http://schemas.openxmlformats.org/drawingml/2006/main" xmlns:r="http://schemas.openxmlformats.org/officeDocument/2006/relationships" xmlns:p="http://schemas.openxmlformats.org/presentationml/2006/main">
   <p:cSld>
     <p:spTree>
       <p:nvGrpSpPr>
@@ -12041,7 +11986,14 @@
         <p:cNvGrpSpPr/>
         <p:nvPr/>
       </p:nvGrpSpPr>
-      <p:grpSpPr/>
+      <p:grpSpPr>
+        <a:xfrm>
+          <a:off x="0" y="0"/>
+          <a:ext cx="0" cy="0"/>
+          <a:chOff x="0" y="0"/>
+          <a:chExt cx="0" cy="0"/>
+        </a:xfrm>
+      </p:grpSpPr>
       <p:sp>
         <p:nvSpPr>
           <p:cNvPr id="2" name="Title 1"/>
@@ -12058,7 +12010,7 @@
           <a:lstStyle/>
           <a:p>
             <a:r>
-              <a:t>血糖機 GM700SB｜藍牙使用須知</a:t>
+              <a:t>RIGHTEST GM700SB｜藍牙使用須知</a:t>
             </a:r>
           </a:p>
         </p:txBody>
@@ -12095,7 +12047,7 @@
         </p:nvSpPr>
         <p:spPr>
           <a:xfrm>
-            <a:off x="920480" y="2196982"/>
+            <a:off x="1166140" y="2195429"/>
             <a:ext cx="360000" cy="360000"/>
           </a:xfrm>
           <a:prstGeom prst="ellipse">
@@ -12128,6 +12080,7 @@
           <a:lstStyle/>
           <a:p>
             <a:pPr algn="ctr"/>
+            <a:endParaRPr/>
           </a:p>
         </p:txBody>
       </p:sp>
@@ -12207,7 +12160,7 @@
           </a:fontRef>
         </p:style>
         <p:txBody>
-          <a:bodyPr rtlCol="0" anchor="ctr" wrap="square" lIns="540000" rIns="160000" tIns="100000"/>
+          <a:bodyPr wrap="square" lIns="540000" tIns="100000" rIns="160000" rtlCol="0" anchor="ctr"/>
           <a:lstStyle/>
           <a:p>
             <a:pPr algn="ctr"/>
@@ -12280,7 +12233,7 @@
           </a:fontRef>
         </p:style>
         <p:txBody>
-          <a:bodyPr rtlCol="0" anchor="ctr" lIns="0" rIns="0" tIns="0" bIns="0"/>
+          <a:bodyPr lIns="0" tIns="0" rIns="0" bIns="0" rtlCol="0" anchor="ctr"/>
           <a:lstStyle/>
           <a:p>
             <a:pPr algn="ctr"/>
@@ -12337,7 +12290,7 @@
           </a:fontRef>
         </p:style>
         <p:txBody>
-          <a:bodyPr rtlCol="0" anchor="ctr" wrap="square" lIns="540000" rIns="160000" tIns="100000"/>
+          <a:bodyPr wrap="square" lIns="540000" tIns="100000" rIns="160000" rtlCol="0" anchor="ctr"/>
           <a:lstStyle/>
           <a:p>
             <a:pPr algn="ctr"/>
@@ -12410,7 +12363,7 @@
           </a:fontRef>
         </p:style>
         <p:txBody>
-          <a:bodyPr rtlCol="0" anchor="ctr" lIns="0" rIns="0" tIns="0" bIns="0"/>
+          <a:bodyPr lIns="0" tIns="0" rIns="0" bIns="0" rtlCol="0" anchor="ctr"/>
           <a:lstStyle/>
           <a:p>
             <a:pPr algn="ctr"/>
@@ -12467,7 +12420,7 @@
           </a:fontRef>
         </p:style>
         <p:txBody>
-          <a:bodyPr rtlCol="0" anchor="ctr" wrap="square" lIns="540000" rIns="160000" tIns="100000"/>
+          <a:bodyPr wrap="square" lIns="540000" tIns="100000" rIns="160000" rtlCol="0" anchor="ctr"/>
           <a:lstStyle/>
           <a:p>
             <a:pPr algn="ctr"/>
@@ -12540,7 +12493,7 @@
           </a:fontRef>
         </p:style>
         <p:txBody>
-          <a:bodyPr rtlCol="0" anchor="ctr" lIns="0" rIns="0" tIns="0" bIns="0"/>
+          <a:bodyPr lIns="0" tIns="0" rIns="0" bIns="0" rtlCol="0" anchor="ctr"/>
           <a:lstStyle/>
           <a:p>
             <a:pPr algn="ctr"/>
@@ -12597,7 +12550,7 @@
           </a:fontRef>
         </p:style>
         <p:txBody>
-          <a:bodyPr rtlCol="0" anchor="ctr" wrap="square" lIns="540000" rIns="160000" tIns="100000"/>
+          <a:bodyPr wrap="square" lIns="540000" tIns="100000" rIns="160000" rtlCol="0" anchor="ctr"/>
           <a:lstStyle/>
           <a:p>
             <a:pPr algn="ctr"/>
@@ -12670,7 +12623,7 @@
           </a:fontRef>
         </p:style>
         <p:txBody>
-          <a:bodyPr rtlCol="0" anchor="ctr" lIns="0" rIns="0" tIns="0" bIns="0"/>
+          <a:bodyPr lIns="0" tIns="0" rIns="0" bIns="0" rtlCol="0" anchor="ctr"/>
           <a:lstStyle/>
           <a:p>
             <a:pPr algn="ctr"/>
@@ -12727,7 +12680,7 @@
           </a:fontRef>
         </p:style>
         <p:txBody>
-          <a:bodyPr rtlCol="0" anchor="ctr" wrap="square" lIns="540000" rIns="160000" tIns="100000"/>
+          <a:bodyPr wrap="square" lIns="540000" tIns="100000" rIns="160000" rtlCol="0" anchor="ctr"/>
           <a:lstStyle/>
           <a:p>
             <a:pPr algn="ctr"/>
@@ -12800,7 +12753,7 @@
           </a:fontRef>
         </p:style>
         <p:txBody>
-          <a:bodyPr rtlCol="0" anchor="ctr" lIns="0" rIns="0" tIns="0" bIns="0"/>
+          <a:bodyPr lIns="0" tIns="0" rIns="0" bIns="0" rtlCol="0" anchor="ctr"/>
           <a:lstStyle/>
           <a:p>
             <a:pPr algn="ctr"/>
@@ -12880,7 +12833,7 @@
                 <a:ea typeface="微軟正黑體"/>
                 <a:cs typeface="微軟正黑體"/>
               </a:rPr>
-              <a:t>中鍵嘗試重新上傳</a:t>
+              <a:t>長按中鍵 3 秒嘗試重新上傳</a:t>
             </a:r>
             <a:r>
               <a:rPr lang="en-US" altLang="zh-TW" dirty="0">
@@ -12924,7 +12877,7 @@
       </p:pic>
       <p:pic>
         <p:nvPicPr>
-          <p:cNvPr id="4" name="Picture 3" descr="screen_upload_success.png"/>
+          <p:cNvPr id="10" name="Picture 9" descr="screen_upload_success.png"/>
           <p:cNvPicPr>
             <a:picLocks noChangeAspect="1"/>
           </p:cNvPicPr>
@@ -12948,7 +12901,7 @@
       </p:pic>
       <p:pic>
         <p:nvPicPr>
-          <p:cNvPr id="5" name="Picture 4" descr="screen_upload_failed.png"/>
+          <p:cNvPr id="11" name="Picture 10" descr="screen_error.png"/>
           <p:cNvPicPr>
             <a:picLocks noChangeAspect="1"/>
           </p:cNvPicPr>
@@ -13039,7 +12992,7 @@
                 <a:ea typeface="微軟正黑體"/>
                 <a:cs typeface="微軟正黑體"/>
               </a:rPr>
-              <a:t>上傳成功</a:t>
+              <a:t>上傳完成</a:t>
             </a:r>
           </a:p>
         </p:txBody>
@@ -13076,7 +13029,7 @@
                 <a:ea typeface="微軟正黑體"/>
                 <a:cs typeface="微軟正黑體"/>
               </a:rPr>
-              <a:t>上傳失敗（會自動重試）</a:t>
+              <a:t>連線失敗（ERROR 畫面）</a:t>
             </a:r>
           </a:p>
         </p:txBody>
@@ -13110,7 +13063,7 @@
               <a:buNone/>
             </a:pPr>
             <a:r>
-              <a:rPr sz="1400" b="1">
+              <a:rPr sz="1400" b="1" dirty="0">
                 <a:solidFill>
                   <a:srgbClr val="333333"/>
                 </a:solidFill>
@@ -13118,8 +13071,27 @@
                 <a:ea typeface="微軟正黑體"/>
                 <a:cs typeface="微軟正黑體"/>
               </a:rPr>
-              <a:t>•  裝置每次連線都會經過這三種狀態</a:t>
-            </a:r>
+              <a:t>•  </a:t>
+            </a:r>
+            <a:r>
+              <a:rPr sz="1400" b="1" dirty="0" err="1">
+                <a:solidFill>
+                  <a:srgbClr val="333333"/>
+                </a:solidFill>
+                <a:latin typeface="微軟正黑體"/>
+                <a:ea typeface="微軟正黑體"/>
+                <a:cs typeface="微軟正黑體"/>
+              </a:rPr>
+              <a:t>裝置每次連線都會經過這三種狀態</a:t>
+            </a:r>
+            <a:endParaRPr sz="1400" b="1" dirty="0">
+              <a:solidFill>
+                <a:srgbClr val="333333"/>
+              </a:solidFill>
+              <a:latin typeface="微軟正黑體"/>
+              <a:ea typeface="微軟正黑體"/>
+              <a:cs typeface="微軟正黑體"/>
+            </a:endParaRPr>
           </a:p>
           <a:p>
             <a:pPr>
@@ -13129,7 +13101,7 @@
               <a:buNone/>
             </a:pPr>
             <a:r>
-              <a:rPr sz="1150" b="0">
+              <a:rPr sz="1150" b="0" dirty="0">
                 <a:solidFill>
                   <a:srgbClr val="757575"/>
                 </a:solidFill>
@@ -13137,8 +13109,115 @@
                 <a:ea typeface="微軟正黑體"/>
                 <a:cs typeface="微軟正黑體"/>
               </a:rPr>
-              <a:t>     連線中 → 送出資料 → 顯示結果</a:t>
-            </a:r>
+              <a:t>     </a:t>
+            </a:r>
+            <a:r>
+              <a:rPr sz="1150" b="0" dirty="0" err="1">
+                <a:solidFill>
+                  <a:srgbClr val="757575"/>
+                </a:solidFill>
+                <a:latin typeface="微軟正黑體"/>
+                <a:ea typeface="微軟正黑體"/>
+                <a:cs typeface="微軟正黑體"/>
+              </a:rPr>
+              <a:t>連線中</a:t>
+            </a:r>
+            <a:r>
+              <a:rPr sz="1150" b="0" dirty="0">
+                <a:solidFill>
+                  <a:srgbClr val="757575"/>
+                </a:solidFill>
+                <a:latin typeface="微軟正黑體"/>
+                <a:ea typeface="微軟正黑體"/>
+                <a:cs typeface="微軟正黑體"/>
+              </a:rPr>
+              <a:t> → </a:t>
+            </a:r>
+            <a:r>
+              <a:rPr sz="1150" b="0" dirty="0" err="1">
+                <a:solidFill>
+                  <a:srgbClr val="757575"/>
+                </a:solidFill>
+                <a:latin typeface="微軟正黑體"/>
+                <a:ea typeface="微軟正黑體"/>
+                <a:cs typeface="微軟正黑體"/>
+              </a:rPr>
+              <a:t>送出資料</a:t>
+            </a:r>
+            <a:r>
+              <a:rPr sz="1150" b="0" dirty="0">
+                <a:solidFill>
+                  <a:srgbClr val="757575"/>
+                </a:solidFill>
+                <a:latin typeface="微軟正黑體"/>
+                <a:ea typeface="微軟正黑體"/>
+                <a:cs typeface="微軟正黑體"/>
+              </a:rPr>
+              <a:t> → </a:t>
+            </a:r>
+            <a:r>
+              <a:rPr sz="1150" b="0" dirty="0" err="1">
+                <a:solidFill>
+                  <a:srgbClr val="757575"/>
+                </a:solidFill>
+                <a:latin typeface="微軟正黑體"/>
+                <a:ea typeface="微軟正黑體"/>
+                <a:cs typeface="微軟正黑體"/>
+              </a:rPr>
+              <a:t>顯示結果；WiFi</a:t>
+            </a:r>
+            <a:r>
+              <a:rPr sz="1150" b="0" dirty="0">
+                <a:solidFill>
+                  <a:srgbClr val="757575"/>
+                </a:solidFill>
+                <a:latin typeface="微軟正黑體"/>
+                <a:ea typeface="微軟正黑體"/>
+                <a:cs typeface="微軟正黑體"/>
+              </a:rPr>
+              <a:t> </a:t>
+            </a:r>
+            <a:r>
+              <a:rPr sz="1150" b="0" dirty="0" err="1">
+                <a:solidFill>
+                  <a:srgbClr val="757575"/>
+                </a:solidFill>
+                <a:latin typeface="微軟正黑體"/>
+                <a:ea typeface="微軟正黑體"/>
+                <a:cs typeface="微軟正黑體"/>
+              </a:rPr>
+              <a:t>連不上會改顯示黑底反白的</a:t>
+            </a:r>
+            <a:r>
+              <a:rPr sz="1150" b="0" dirty="0">
+                <a:solidFill>
+                  <a:srgbClr val="757575"/>
+                </a:solidFill>
+                <a:latin typeface="微軟正黑體"/>
+                <a:ea typeface="微軟正黑體"/>
+                <a:cs typeface="微軟正黑體"/>
+              </a:rPr>
+              <a:t> ERROR </a:t>
+            </a:r>
+            <a:r>
+              <a:rPr sz="1150" b="0" dirty="0" err="1">
+                <a:solidFill>
+                  <a:srgbClr val="757575"/>
+                </a:solidFill>
+                <a:latin typeface="微軟正黑體"/>
+                <a:ea typeface="微軟正黑體"/>
+                <a:cs typeface="微軟正黑體"/>
+              </a:rPr>
+              <a:t>畫面</a:t>
+            </a:r>
+            <a:endParaRPr sz="1150" b="0" dirty="0">
+              <a:solidFill>
+                <a:srgbClr val="757575"/>
+              </a:solidFill>
+              <a:latin typeface="微軟正黑體"/>
+              <a:ea typeface="微軟正黑體"/>
+              <a:cs typeface="微軟正黑體"/>
+            </a:endParaRPr>
           </a:p>
           <a:p>
             <a:pPr>
@@ -13148,7 +13227,7 @@
               <a:buNone/>
             </a:pPr>
             <a:r>
-              <a:rPr sz="1400" b="1">
+              <a:rPr sz="1400" b="1" dirty="0">
                 <a:solidFill>
                   <a:srgbClr val="333333"/>
                 </a:solidFill>
@@ -13156,8 +13235,27 @@
                 <a:ea typeface="微軟正黑體"/>
                 <a:cs typeface="微軟正黑體"/>
               </a:rPr>
-              <a:t>•  失敗不會遺失資料</a:t>
-            </a:r>
+              <a:t>•  </a:t>
+            </a:r>
+            <a:r>
+              <a:rPr sz="1400" b="1" dirty="0" err="1">
+                <a:solidFill>
+                  <a:srgbClr val="333333"/>
+                </a:solidFill>
+                <a:latin typeface="微軟正黑體"/>
+                <a:ea typeface="微軟正黑體"/>
+                <a:cs typeface="微軟正黑體"/>
+              </a:rPr>
+              <a:t>失敗不會遺失資料</a:t>
+            </a:r>
+            <a:endParaRPr sz="1400" b="1" dirty="0">
+              <a:solidFill>
+                <a:srgbClr val="333333"/>
+              </a:solidFill>
+              <a:latin typeface="微軟正黑體"/>
+              <a:ea typeface="微軟正黑體"/>
+              <a:cs typeface="微軟正黑體"/>
+            </a:endParaRPr>
           </a:p>
           <a:p>
             <a:pPr>
@@ -13167,7 +13265,7 @@
               <a:buNone/>
             </a:pPr>
             <a:r>
-              <a:rPr sz="1150" b="0">
+              <a:rPr sz="1150" b="0" dirty="0">
                 <a:solidFill>
                   <a:srgbClr val="757575"/>
                 </a:solidFill>
@@ -13175,8 +13273,27 @@
                 <a:ea typeface="微軟正黑體"/>
                 <a:cs typeface="微軟正黑體"/>
               </a:rPr>
-              <a:t>     待傳紀錄會保留，之後自動重試</a:t>
-            </a:r>
+              <a:t>     </a:t>
+            </a:r>
+            <a:r>
+              <a:rPr sz="1150" b="0" dirty="0" err="1">
+                <a:solidFill>
+                  <a:srgbClr val="757575"/>
+                </a:solidFill>
+                <a:latin typeface="微軟正黑體"/>
+                <a:ea typeface="微軟正黑體"/>
+                <a:cs typeface="微軟正黑體"/>
+              </a:rPr>
+              <a:t>待傳紀錄會保留；每次連線嘗試最長約 1 分鐘，失敗後約 1 小時會自動重試一次，也可以長按中鍵 3 秒立即重試</a:t>
+            </a:r>
+            <a:endParaRPr sz="1150" b="0" dirty="0">
+              <a:solidFill>
+                <a:srgbClr val="757575"/>
+              </a:solidFill>
+              <a:latin typeface="微軟正黑體"/>
+              <a:ea typeface="微軟正黑體"/>
+              <a:cs typeface="微軟正黑體"/>
+            </a:endParaRPr>
           </a:p>
         </p:txBody>
       </p:sp>
@@ -14051,7 +14168,7 @@
                           <a:ea typeface="微軟正黑體"/>
                           <a:cs typeface="微軟正黑體"/>
                         </a:rPr>
-                        <a:t>確認量測裝置藍牙開啟、電池足夠。同一台裝置量測後需要等一段時間（額溫槍約1分鐘、血壓計約3分鐘）才會再連線</a:t>
+                        <a:t>確認量測裝置藍牙開啟、電池足夠。同一台裝置量測後需要等一段時間（額溫槍約1分鐘、血壓計約3分鐘）才會再連線；血糖機 GM700SB 不會自動連線，每次都要在中繼器上短按中鍵開啟 30 秒搜尋視窗</a:t>
                       </a:r>
                     </a:p>
                   </a:txBody>
@@ -14165,7 +14282,7 @@
                           <a:ea typeface="微軟正黑體"/>
                           <a:cs typeface="微軟正黑體"/>
                         </a:rPr>
-                        <a:t>通常是 WiFi 連不上——螢幕會顯示「WiFi connect failed, will retry」，每次嘗試最長約 1 分鐘就會放棄；放棄後約 1 小時才會自動再試一次，避免一直做白工佔用量測時間；想立刻重試可按中鍵，持續失敗請確認密碼是否正確</a:t>
+                        <a:t>通常是 WiFi 連不上——螢幕會顯示「WiFi connect failed, will retry」，每次嘗試最長約 1 分鐘就會放棄；放棄後約 1 小時才會自動再試一次，避免一直做白工佔用量測時間；想立刻重試可長按中鍵 3 秒，持續失敗請確認密碼是否正確</a:t>
                       </a:r>
                     </a:p>
                   </a:txBody>
@@ -14743,7 +14860,7 @@
                 <a:ea typeface="微軟正黑體"/>
                 <a:cs typeface="微軟正黑體"/>
               </a:rPr>
-              <a:t>     只有「第一次安裝」或「換環境」才需要動手設定</a:t>
+              <a:t>     只有「第一次安裝」或「換環境」才需要動手設定；血糖機 GM700SB 例外，每次都要按中鍵才會同步</a:t>
             </a:r>
           </a:p>
         </p:txBody>
@@ -14834,7 +14951,7 @@
         <p:spPr>
           <a:xfrm>
             <a:off x="457200" y="1234440"/>
-            <a:ext cx="1885950" cy="4206240"/>
+            <a:ext cx="1463040" cy="4206240"/>
           </a:xfrm>
           <a:prstGeom prst="roundRect">
             <a:avLst>
@@ -14890,8 +15007,8 @@
         </p:blipFill>
         <p:spPr>
           <a:xfrm>
-            <a:off x="594360" y="1708785"/>
-            <a:ext cx="1611630" cy="1611630"/>
+            <a:off x="563603" y="1708785"/>
+            <a:ext cx="1250234" cy="1250234"/>
           </a:xfrm>
           <a:prstGeom prst="rect">
             <a:avLst/>
@@ -14907,7 +15024,7 @@
         <p:spPr>
           <a:xfrm>
             <a:off x="548640" y="3749040"/>
-            <a:ext cx="1703070" cy="685800"/>
+            <a:ext cx="1321169" cy="685800"/>
           </a:xfrm>
           <a:prstGeom prst="rect">
             <a:avLst/>
@@ -14958,7 +15075,7 @@
         <p:spPr>
           <a:xfrm>
             <a:off x="548640" y="4480560"/>
-            <a:ext cx="1703070" cy="914400"/>
+            <a:ext cx="1321169" cy="914400"/>
           </a:xfrm>
           <a:prstGeom prst="rect">
             <a:avLst/>
@@ -14994,8 +15111,8 @@
         </p:nvSpPr>
         <p:spPr>
           <a:xfrm>
-            <a:off x="2571750" y="1234440"/>
-            <a:ext cx="1885950" cy="4206240"/>
+            <a:off x="2148840" y="1234440"/>
+            <a:ext cx="1463040" cy="4206240"/>
           </a:xfrm>
           <a:prstGeom prst="roundRect">
             <a:avLst>
@@ -15051,8 +15168,8 @@
         </p:blipFill>
         <p:spPr>
           <a:xfrm>
-            <a:off x="2708910" y="1708785"/>
-            <a:ext cx="1611630" cy="1611630"/>
+            <a:off x="2255243" y="1708785"/>
+            <a:ext cx="1250234" cy="1250234"/>
           </a:xfrm>
           <a:prstGeom prst="rect">
             <a:avLst/>
@@ -15067,8 +15184,8 @@
         </p:nvSpPr>
         <p:spPr>
           <a:xfrm>
-            <a:off x="2663190" y="3749040"/>
-            <a:ext cx="1703070" cy="685800"/>
+            <a:off x="2240280" y="3749040"/>
+            <a:ext cx="1321169" cy="685800"/>
           </a:xfrm>
           <a:prstGeom prst="rect">
             <a:avLst/>
@@ -15118,8 +15235,8 @@
         </p:nvSpPr>
         <p:spPr>
           <a:xfrm>
-            <a:off x="2663190" y="4480560"/>
-            <a:ext cx="1703070" cy="914400"/>
+            <a:off x="2240280" y="4480560"/>
+            <a:ext cx="1321169" cy="914400"/>
           </a:xfrm>
           <a:prstGeom prst="rect">
             <a:avLst/>
@@ -15155,8 +15272,8 @@
         </p:nvSpPr>
         <p:spPr>
           <a:xfrm>
-            <a:off x="4686300" y="1234440"/>
-            <a:ext cx="1885950" cy="4206240"/>
+            <a:off x="3840480" y="1234440"/>
+            <a:ext cx="1463040" cy="4206240"/>
           </a:xfrm>
           <a:prstGeom prst="roundRect">
             <a:avLst>
@@ -15212,8 +15329,8 @@
         </p:blipFill>
         <p:spPr>
           <a:xfrm>
-            <a:off x="4823460" y="1708785"/>
-            <a:ext cx="1611630" cy="1611630"/>
+            <a:off x="3946883" y="1708785"/>
+            <a:ext cx="1250234" cy="1250234"/>
           </a:xfrm>
           <a:prstGeom prst="rect">
             <a:avLst/>
@@ -15228,8 +15345,8 @@
         </p:nvSpPr>
         <p:spPr>
           <a:xfrm>
-            <a:off x="4777740" y="3749040"/>
-            <a:ext cx="1703070" cy="685800"/>
+            <a:off x="3931920" y="3749040"/>
+            <a:ext cx="1321169" cy="685800"/>
           </a:xfrm>
           <a:prstGeom prst="rect">
             <a:avLst/>
@@ -15279,8 +15396,8 @@
         </p:nvSpPr>
         <p:spPr>
           <a:xfrm>
-            <a:off x="4777740" y="4480560"/>
-            <a:ext cx="1703070" cy="914400"/>
+            <a:off x="3931920" y="4480560"/>
+            <a:ext cx="1321169" cy="914400"/>
           </a:xfrm>
           <a:prstGeom prst="rect">
             <a:avLst/>
@@ -15316,8 +15433,8 @@
         </p:nvSpPr>
         <p:spPr>
           <a:xfrm>
-            <a:off x="6800850" y="1234440"/>
-            <a:ext cx="1885950" cy="4206240"/>
+            <a:off x="5532120" y="1234440"/>
+            <a:ext cx="1463040" cy="4206240"/>
           </a:xfrm>
           <a:prstGeom prst="roundRect">
             <a:avLst>
@@ -15373,8 +15490,8 @@
         </p:blipFill>
         <p:spPr>
           <a:xfrm>
-            <a:off x="7172325" y="1371600"/>
-            <a:ext cx="1143000" cy="2286000"/>
+            <a:off x="5820295" y="1371600"/>
+            <a:ext cx="886690" cy="1773381"/>
           </a:xfrm>
           <a:prstGeom prst="rect">
             <a:avLst/>
@@ -15389,8 +15506,8 @@
         </p:nvSpPr>
         <p:spPr>
           <a:xfrm>
-            <a:off x="6892290" y="3749040"/>
-            <a:ext cx="1703070" cy="685800"/>
+            <a:off x="5623560" y="3749040"/>
+            <a:ext cx="1321169" cy="685800"/>
           </a:xfrm>
           <a:prstGeom prst="rect">
             <a:avLst/>
@@ -15440,8 +15557,8 @@
         </p:nvSpPr>
         <p:spPr>
           <a:xfrm>
-            <a:off x="6892290" y="4480560"/>
-            <a:ext cx="1703070" cy="914400"/>
+            <a:off x="5623560" y="4480560"/>
+            <a:ext cx="1321169" cy="914400"/>
           </a:xfrm>
           <a:prstGeom prst="rect">
             <a:avLst/>
@@ -15466,6 +15583,165 @@
               </a:rPr>
               <a:t>血糖／HCT／酮體
 尿酸／膽固醇／血紅素</a:t>
+            </a:r>
+          </a:p>
+        </p:txBody>
+      </p:sp>
+      <p:sp>
+        <p:nvSpPr>
+          <p:cNvPr id="19" name="Rounded Rectangle 18"/>
+          <p:cNvSpPr/>
+          <p:nvPr/>
+        </p:nvSpPr>
+        <p:spPr>
+          <a:xfrm>
+            <a:off x="7223760" y="1234440"/>
+            <a:ext cx="1463040" cy="4206240"/>
+          </a:xfrm>
+          <a:prstGeom prst="roundRect">
+            <a:avLst/>
+          </a:prstGeom>
+          <a:solidFill>
+            <a:srgbClr val="F4F8F9"/>
+          </a:solidFill>
+          <a:ln w="25400">
+            <a:solidFill>
+              <a:srgbClr val="1F6F78"/>
+            </a:solidFill>
+          </a:ln>
+          <a:effectLst/>
+        </p:spPr>
+        <p:style>
+          <a:lnRef idx="1">
+            <a:schemeClr val="accent1"/>
+          </a:lnRef>
+          <a:fillRef idx="3">
+            <a:schemeClr val="accent1"/>
+          </a:fillRef>
+          <a:effectRef idx="2">
+            <a:schemeClr val="accent1"/>
+          </a:effectRef>
+          <a:fontRef idx="minor">
+            <a:schemeClr val="lt1"/>
+          </a:fontRef>
+        </p:style>
+        <p:txBody>
+          <a:bodyPr rtlCol="0" anchor="ctr"/>
+          <a:lstStyle/>
+          <a:p>
+            <a:pPr algn="ctr"/>
+            <a:endParaRPr/>
+          </a:p>
+        </p:txBody>
+      </p:sp>
+      <p:pic>
+        <p:nvPicPr>
+          <p:cNvPr id="20" name="Picture 19" descr="image.jpg"/>
+          <p:cNvPicPr>
+            <a:picLocks noChangeAspect="1"/>
+          </p:cNvPicPr>
+          <p:nvPr/>
+        </p:nvPicPr>
+        <p:blipFill>
+          <a:blip r:embed="rId6"/>
+          <a:stretch>
+            <a:fillRect/>
+          </a:stretch>
+        </p:blipFill>
+        <p:spPr>
+          <a:xfrm>
+            <a:off x="7333445" y="1371600"/>
+            <a:ext cx="1243669" cy="1773381"/>
+          </a:xfrm>
+          <a:prstGeom prst="rect">
+            <a:avLst/>
+          </a:prstGeom>
+        </p:spPr>
+      </p:pic>
+      <p:sp>
+        <p:nvSpPr>
+          <p:cNvPr id="21" name="TextBox 20"/>
+          <p:cNvSpPr txBox="1"/>
+          <p:nvPr/>
+        </p:nvSpPr>
+        <p:spPr>
+          <a:xfrm>
+            <a:off x="7315200" y="3749040"/>
+            <a:ext cx="1280160" cy="685800"/>
+          </a:xfrm>
+          <a:prstGeom prst="rect">
+            <a:avLst/>
+          </a:prstGeom>
+          <a:noFill/>
+        </p:spPr>
+        <p:txBody>
+          <a:bodyPr wrap="square">
+            <a:spAutoFit/>
+          </a:bodyPr>
+          <a:lstStyle/>
+          <a:p>
+            <a:pPr algn="ctr"/>
+            <a:r>
+              <a:rPr sz="1300" b="1">
+                <a:solidFill>
+                  <a:srgbClr val="1F6F78"/>
+                </a:solidFill>
+                <a:latin typeface="微軟正黑體"/>
+                <a:ea typeface="微軟正黑體"/>
+                <a:cs typeface="微軟正黑體"/>
+              </a:rPr>
+              <a:t>RIGHTEST GM700SB</a:t>
+            </a:r>
+          </a:p>
+          <a:p>
+            <a:pPr algn="ctr"/>
+            <a:r>
+              <a:rPr sz="1150" b="1">
+                <a:solidFill>
+                  <a:srgbClr val="333333"/>
+                </a:solidFill>
+                <a:latin typeface="微軟正黑體"/>
+                <a:ea typeface="微軟正黑體"/>
+                <a:cs typeface="微軟正黑體"/>
+              </a:rPr>
+              <a:t>血糖機</a:t>
+            </a:r>
+          </a:p>
+        </p:txBody>
+      </p:sp>
+      <p:sp>
+        <p:nvSpPr>
+          <p:cNvPr id="22" name="TextBox 21"/>
+          <p:cNvSpPr txBox="1"/>
+          <p:nvPr/>
+        </p:nvSpPr>
+        <p:spPr>
+          <a:xfrm>
+            <a:off x="7315200" y="4480560"/>
+            <a:ext cx="1280160" cy="914400"/>
+          </a:xfrm>
+          <a:prstGeom prst="rect">
+            <a:avLst/>
+          </a:prstGeom>
+          <a:noFill/>
+        </p:spPr>
+        <p:txBody>
+          <a:bodyPr wrap="square">
+            <a:spAutoFit/>
+          </a:bodyPr>
+          <a:lstStyle/>
+          <a:p>
+            <a:pPr algn="ctr"/>
+            <a:r>
+              <a:rPr sz="1050" b="0">
+                <a:solidFill>
+                  <a:srgbClr val="757575"/>
+                </a:solidFill>
+                <a:latin typeface="微軟正黑體"/>
+                <a:ea typeface="微軟正黑體"/>
+                <a:cs typeface="微軟正黑體"/>
+              </a:rPr>
+              <a:t>血糖</a:t>
             </a:r>
           </a:p>
         </p:txBody>
@@ -16125,8 +16401,8 @@
         </p:nvSpPr>
         <p:spPr>
           <a:xfrm>
-            <a:off x="6432871" y="3384616"/>
-            <a:ext cx="976717" cy="415498"/>
+            <a:off x="6432871" y="3111640"/>
+            <a:ext cx="976717" cy="1000000"/>
           </a:xfrm>
           <a:prstGeom prst="rect">
             <a:avLst/>
@@ -16139,9 +16415,8 @@
           </a:bodyPr>
           <a:lstStyle/>
           <a:p>
-            <a:pPr algn="ctr"/>
-            <a:r>
-              <a:rPr sz="1050">
+            <a:r>
+              <a:rPr sz="1050" b="0">
                 <a:solidFill>
                   <a:srgbClr val="757575"/>
                 </a:solidFill>
@@ -16149,30 +16424,35 @@
                 <a:ea typeface="微軟正黑體"/>
                 <a:cs typeface="微軟正黑體"/>
               </a:rPr>
-              <a:t>GM700SB</a:t>
-            </a:r>
-          </a:p>
-          <a:p>
-            <a:r>
-              <a:rPr sz="1100" b="1">
-                <a:solidFill>
-                  <a:srgbClr val="333333"/>
-                </a:solidFill>
-                <a:latin typeface="微軟正黑體"/>
-                <a:ea typeface="微軟正黑體"/>
-                <a:cs typeface="微軟正黑體"/>
-              </a:rPr>
-              <a:t>血糖同步</a:t>
+              <a:t>GM700SB 同步</a:t>
             </a:r>
           </a:p>
           <a:p>
             <a:pPr>
               <a:spcBef>
-                <a:spcPts val="200"/>
+                <a:spcPts val="600"/>
               </a:spcBef>
             </a:pPr>
             <a:r>
-              <a:rPr sz="1000" b="0">
+              <a:rPr sz="1300" b="1">
+                <a:solidFill>
+                  <a:srgbClr val="333333"/>
+                </a:solidFill>
+                <a:latin typeface="微軟正黑體"/>
+                <a:ea typeface="微軟正黑體"/>
+                <a:cs typeface="微軟正黑體"/>
+              </a:rPr>
+              <a:t>長按 3 秒</a:t>
+            </a:r>
+          </a:p>
+          <a:p>
+            <a:pPr>
+              <a:spcBef>
+                <a:spcPts val="100"/>
+              </a:spcBef>
+            </a:pPr>
+            <a:r>
+              <a:rPr sz="1050" b="0">
                 <a:solidFill>
                   <a:srgbClr val="757575"/>
                 </a:solidFill>
@@ -16180,7 +16460,7 @@
                 <a:ea typeface="微軟正黑體"/>
                 <a:cs typeface="微軟正黑體"/>
               </a:rPr>
-              <a:t>長按 3 秒：手動上傳</a:t>
+              <a:t>手動上傳</a:t>
             </a:r>
           </a:p>
         </p:txBody>
@@ -17673,7 +17953,7 @@
                 <a:ea typeface="微軟正黑體"/>
                 <a:cs typeface="微軟正黑體"/>
               </a:rPr>
-              <a:t>長按左鍵 3 秒即可隨時重新進入設定畫面，不用重開機——這次沒有 3 分鐘的時間限制，可以慢慢填</a:t>
+              <a:t>長按左鍵 3 秒即可隨時重新進入設定畫面，不用重開機——一樣有 3 分鐘時間限制，避免誤觸後長時間沒接收資料</a:t>
             </a:r>
           </a:p>
         </p:txBody>

--- a/說明/生理訊號中繼裝置_操作說明.pptx
+++ b/說明/生理訊號中繼裝置_操作說明.pptx
@@ -5027,7 +5027,7 @@
                 <a:ea typeface="微軟正黑體"/>
                 <a:cs typeface="微軟正黑體"/>
               </a:rPr>
-              <a:t>生理訊號中繼裝置 操作說明</a:t>
+              <a:t>SmartGateway 操作說明</a:t>
             </a:r>
           </a:p>
         </p:txBody>
@@ -5130,7 +5130,7 @@
       </p:sp>
       <p:pic>
         <p:nvPicPr>
-          <p:cNvPr id="3" name="Picture 2" descr="screen_ap_config.png"/>
+          <p:cNvPr id="12" name="Picture 11" descr="screen_ap_config.png"/>
           <p:cNvPicPr>
             <a:picLocks noChangeAspect="1"/>
           </p:cNvPicPr>
@@ -5249,7 +5249,7 @@
           <a:p>
             <a:pPr algn="ctr"/>
             <a:r>
-              <a:rPr sz="1400" b="1">
+              <a:rPr sz="1400" b="1" dirty="0">
                 <a:solidFill>
                   <a:srgbClr val="FFFFFF"/>
                 </a:solidFill>
@@ -5294,27 +5294,21 @@
                 <a:ea typeface="微軟正黑體"/>
                 <a:cs typeface="微軟正黑體"/>
               </a:rPr>
-              <a:t>開機後裝置一律先進入這個畫面，最長等待 3 分鐘；沒人操作就自動進入量測模式</a:t>
-            </a:r>
-          </a:p>
-        </p:txBody>
-      </p:sp>
-      <p:sp>
-        <p:nvSpPr>
-          <p:cNvPr id="9" name="文字方塊 8">
-            <a:extLst>
-              <a:ext uri="{FF2B5EF4-FFF2-40B4-BE49-F238E27FC236}">
-                <a16:creationId xmlns:a16="http://schemas.microsoft.com/office/drawing/2014/main" id="{E5DCC9B7-592B-9072-98B5-7172206A34B9}"/>
-              </a:ext>
-            </a:extLst>
-          </p:cNvPr>
+              <a:t>開機後 SmartGateway 一律先進入這個畫面，最長等待 3 分鐘；沒人操作就自動進入量測模式</a:t>
+            </a:r>
+          </a:p>
+        </p:txBody>
+      </p:sp>
+      <p:sp>
+        <p:nvSpPr>
+          <p:cNvPr id="10" name="TextBox 9"/>
           <p:cNvSpPr txBox="1"/>
           <p:nvPr/>
         </p:nvSpPr>
         <p:spPr>
           <a:xfrm>
-            <a:off x="1005762" y="5177080"/>
-            <a:ext cx="4572000" cy="851515"/>
+            <a:off x="1005762" y="1967761"/>
+            <a:ext cx="3279635" cy="553998"/>
           </a:xfrm>
           <a:prstGeom prst="rect">
             <a:avLst/>
@@ -5327,15 +5321,8 @@
           </a:bodyPr>
           <a:lstStyle/>
           <a:p>
-            <a:pPr>
-              <a:spcAft>
-                <a:spcPts val="400"/>
-              </a:spcAft>
-              <a:buFontTx/>
-              <a:buNone/>
-            </a:pPr>
-            <a:r>
-              <a:rPr lang="en-US" altLang="zh-TW" sz="2800" b="1" kern="0" dirty="0">
+            <a:r>
+              <a:rPr sz="1500" b="1" dirty="0">
                 <a:solidFill>
                   <a:srgbClr val="333333"/>
                 </a:solidFill>
@@ -5343,74 +5330,21 @@
                 <a:ea typeface="微軟正黑體"/>
                 <a:cs typeface="微軟正黑體"/>
               </a:rPr>
-              <a:t>•  </a:t>
-            </a:r>
-            <a:r>
-              <a:rPr lang="zh-TW" altLang="en-US" sz="2800" b="1" kern="0" dirty="0">
-                <a:solidFill>
-                  <a:srgbClr val="333333"/>
-                </a:solidFill>
-                <a:latin typeface="微軟正黑體"/>
-                <a:ea typeface="微軟正黑體"/>
-                <a:cs typeface="微軟正黑體"/>
-              </a:rPr>
-              <a:t>忘記熱點密碼？</a:t>
-            </a:r>
-          </a:p>
-          <a:p>
-            <a:pPr>
-              <a:spcAft>
-                <a:spcPts val="1600"/>
-              </a:spcAft>
-              <a:buFontTx/>
-              <a:buNone/>
-            </a:pPr>
-            <a:r>
-              <a:rPr lang="zh-TW" altLang="en-US" sz="1800" kern="0" dirty="0">
-                <a:solidFill>
-                  <a:srgbClr val="757575"/>
-                </a:solidFill>
-                <a:latin typeface="微軟正黑體"/>
-                <a:ea typeface="微軟正黑體"/>
-                <a:cs typeface="微軟正黑體"/>
-              </a:rPr>
-              <a:t>     固定值 </a:t>
-            </a:r>
-            <a:r>
-              <a:rPr lang="en-US" altLang="zh-TW" sz="1800" kern="0" dirty="0">
-                <a:solidFill>
-                  <a:srgbClr val="757575"/>
-                </a:solidFill>
-                <a:latin typeface="微軟正黑體"/>
-                <a:ea typeface="微軟正黑體"/>
-                <a:cs typeface="微軟正黑體"/>
-              </a:rPr>
-              <a:t>02750963</a:t>
-            </a:r>
-            <a:r>
-              <a:rPr lang="zh-TW" altLang="en-US" sz="1800" kern="0" dirty="0">
-                <a:solidFill>
-                  <a:srgbClr val="757575"/>
-                </a:solidFill>
-                <a:latin typeface="微軟正黑體"/>
-                <a:ea typeface="微軟正黑體"/>
-                <a:cs typeface="微軟正黑體"/>
-              </a:rPr>
-              <a:t>，螢幕上也看得到</a:t>
-            </a:r>
-          </a:p>
-        </p:txBody>
-      </p:sp>
-      <p:sp>
-        <p:nvSpPr>
-          <p:cNvPr id="10" name="TextBox 9"/>
+              <a:t>Wi-Fi 名稱／個案身份證字號（供核對用）</a:t>
+            </a:r>
+          </a:p>
+        </p:txBody>
+      </p:sp>
+      <p:sp>
+        <p:nvSpPr>
+          <p:cNvPr id="11" name="TextBox 10"/>
           <p:cNvSpPr txBox="1"/>
           <p:nvPr/>
         </p:nvSpPr>
         <p:spPr>
           <a:xfrm>
-            <a:off x="5760720" y="1234440"/>
-            <a:ext cx="2926080" cy="1249197"/>
+            <a:off x="5760720" y="2575077"/>
+            <a:ext cx="2926080" cy="3871443"/>
           </a:xfrm>
           <a:prstGeom prst="rect">
             <a:avLst/>
@@ -5432,7 +5366,7 @@
                 <a:ea typeface="微軟正黑體"/>
                 <a:cs typeface="微軟正黑體"/>
               </a:rPr>
-              <a:t>•  Wi-Fi 名稱／密碼／個案身份證字號（供核對用）</a:t>
+              <a:t>步驟 2：「1. Join WiFi」QR code</a:t>
             </a:r>
           </a:p>
           <a:p>
@@ -5450,61 +5384,7 @@
                 <a:ea typeface="微軟正黑體"/>
                 <a:cs typeface="微軟正黑體"/>
               </a:rPr>
-              <a:t>     黑底白字是欄位名稱，下面才是實際的值</a:t>
-            </a:r>
-          </a:p>
-        </p:txBody>
-      </p:sp>
-      <p:sp>
-        <p:nvSpPr>
-          <p:cNvPr id="11" name="TextBox 10"/>
-          <p:cNvSpPr txBox="1"/>
-          <p:nvPr/>
-        </p:nvSpPr>
-        <p:spPr>
-          <a:xfrm>
-            <a:off x="5760720" y="2575077"/>
-            <a:ext cx="2926080" cy="3871443"/>
-          </a:xfrm>
-          <a:prstGeom prst="rect">
-            <a:avLst/>
-          </a:prstGeom>
-          <a:noFill/>
-        </p:spPr>
-        <p:txBody>
-          <a:bodyPr wrap="square">
-            <a:spAutoFit/>
-          </a:bodyPr>
-          <a:lstStyle/>
-          <a:p>
-            <a:r>
-              <a:rPr sz="1500" b="1">
-                <a:solidFill>
-                  <a:srgbClr val="333333"/>
-                </a:solidFill>
-                <a:latin typeface="微軟正黑體"/>
-                <a:ea typeface="微軟正黑體"/>
-                <a:cs typeface="微軟正黑體"/>
-              </a:rPr>
-              <a:t>步驟 2：「1. Join WiFi」QR code</a:t>
-            </a:r>
-          </a:p>
-          <a:p>
-            <a:pPr>
-              <a:spcBef>
-                <a:spcPts val="200"/>
-              </a:spcBef>
-            </a:pPr>
-            <a:r>
-              <a:rPr sz="1200" b="0">
-                <a:solidFill>
-                  <a:srgbClr val="757575"/>
-                </a:solidFill>
-                <a:latin typeface="微軟正黑體"/>
-                <a:ea typeface="微軟正黑體"/>
-                <a:cs typeface="微軟正黑體"/>
-              </a:rPr>
-              <a:t>     用手機相機掃描，自動加入這台裝置的熱點</a:t>
+              <a:t>     用手機相機掃描，自動加入這台 SmartGateway 的熱點</a:t>
             </a:r>
           </a:p>
           <a:p>
@@ -6114,29 +5994,7 @@
                 <a:ea typeface="微軟正黑體"/>
                 <a:cs typeface="微軟正黑體"/>
               </a:rPr>
-              <a:t>按住左鍵 </a:t>
-            </a:r>
-            <a:r>
-              <a:rPr lang="en-US" altLang="zh-TW" sz="1900" b="1" kern="0" dirty="0">
-                <a:solidFill>
-                  <a:srgbClr val="333333"/>
-                </a:solidFill>
-                <a:latin typeface="微軟正黑體"/>
-                <a:ea typeface="微軟正黑體"/>
-                <a:cs typeface="微軟正黑體"/>
-              </a:rPr>
-              <a:t>1 </a:t>
-            </a:r>
-            <a:r>
-              <a:rPr lang="zh-TW" altLang="en-US" sz="1900" b="1" kern="0" dirty="0">
-                <a:solidFill>
-                  <a:srgbClr val="333333"/>
-                </a:solidFill>
-                <a:latin typeface="微軟正黑體"/>
-                <a:ea typeface="微軟正黑體"/>
-                <a:cs typeface="微軟正黑體"/>
-              </a:rPr>
-              <a:t>秒＝取消</a:t>
+              <a:t>短按左鍵 ＝取消修改，回到日常量測</a:t>
             </a:r>
           </a:p>
           <a:p>
@@ -6191,7 +6049,7 @@
         </p:nvSpPr>
         <p:spPr>
           <a:xfrm>
-            <a:off x="450850" y="5470000"/>
+            <a:off x="450850" y="5007453"/>
             <a:ext cx="4200000" cy="850000"/>
           </a:xfrm>
           <a:prstGeom prst="roundRect">
@@ -6227,7 +6085,7 @@
           <a:p>
             <a:pPr algn="ctr"/>
             <a:r>
-              <a:rPr sz="1300" b="1">
+              <a:rPr sz="1300" b="1" dirty="0" err="1">
                 <a:solidFill>
                   <a:srgbClr val="134349"/>
                 </a:solidFill>
@@ -6235,8 +6093,16 @@
                 <a:ea typeface="微軟正黑體"/>
                 <a:cs typeface="微軟正黑體"/>
               </a:rPr>
-              <a:t>這裡的 Wi-Fi 跟步驟 2 連的裝置熱點不一樣</a:t>
-            </a:r>
+              <a:t>這裡的 Wi-Fi 跟步驟 2 連的 SmartGateway 熱點不一樣</a:t>
+            </a:r>
+            <a:endParaRPr sz="1300" b="1" dirty="0">
+              <a:solidFill>
+                <a:srgbClr val="134349"/>
+              </a:solidFill>
+              <a:latin typeface="微軟正黑體"/>
+              <a:ea typeface="微軟正黑體"/>
+              <a:cs typeface="微軟正黑體"/>
+            </a:endParaRPr>
           </a:p>
           <a:p>
             <a:pPr>
@@ -6245,7 +6111,7 @@
               </a:spcBef>
             </a:pPr>
             <a:r>
-              <a:rPr sz="1100" b="0">
+              <a:rPr sz="1100" b="0" dirty="0" err="1">
                 <a:solidFill>
                   <a:srgbClr val="757575"/>
                 </a:solidFill>
@@ -6253,8 +6119,179 @@
                 <a:ea typeface="微軟正黑體"/>
                 <a:cs typeface="微軟正黑體"/>
               </a:rPr>
-              <a:t>裝置熱點只是暫時用來設定；這裡選的才是裝置之後要連上網路用的 Wi-Fi</a:t>
-            </a:r>
+              <a:t>SmartGateway</a:t>
+            </a:r>
+            <a:r>
+              <a:rPr sz="1100" b="0" dirty="0">
+                <a:solidFill>
+                  <a:srgbClr val="757575"/>
+                </a:solidFill>
+                <a:latin typeface="微軟正黑體"/>
+                <a:ea typeface="微軟正黑體"/>
+                <a:cs typeface="微軟正黑體"/>
+              </a:rPr>
+              <a:t> </a:t>
+            </a:r>
+            <a:r>
+              <a:rPr sz="1100" b="0" dirty="0" err="1">
+                <a:solidFill>
+                  <a:srgbClr val="757575"/>
+                </a:solidFill>
+                <a:latin typeface="微軟正黑體"/>
+                <a:ea typeface="微軟正黑體"/>
+                <a:cs typeface="微軟正黑體"/>
+              </a:rPr>
+              <a:t>熱點只是暫時用來設定；這裡選的才是之後要連上網路用的</a:t>
+            </a:r>
+            <a:r>
+              <a:rPr sz="1100" b="0" dirty="0">
+                <a:solidFill>
+                  <a:srgbClr val="757575"/>
+                </a:solidFill>
+                <a:latin typeface="微軟正黑體"/>
+                <a:ea typeface="微軟正黑體"/>
+                <a:cs typeface="微軟正黑體"/>
+              </a:rPr>
+              <a:t> Wi-Fi</a:t>
+            </a:r>
+          </a:p>
+        </p:txBody>
+      </p:sp>
+      <p:sp>
+        <p:nvSpPr>
+          <p:cNvPr id="4" name="Oval 4">
+            <a:extLst>
+              <a:ext uri="{FF2B5EF4-FFF2-40B4-BE49-F238E27FC236}">
+                <a16:creationId xmlns:a16="http://schemas.microsoft.com/office/drawing/2014/main" id="{9653A68D-30CB-E13D-DA63-E8032D1ACE2F}"/>
+              </a:ext>
+            </a:extLst>
+          </p:cNvPr>
+          <p:cNvSpPr/>
+          <p:nvPr/>
+        </p:nvSpPr>
+        <p:spPr>
+          <a:xfrm>
+            <a:off x="4650850" y="2570898"/>
+            <a:ext cx="347472" cy="347472"/>
+          </a:xfrm>
+          <a:prstGeom prst="ellipse">
+            <a:avLst/>
+          </a:prstGeom>
+          <a:solidFill>
+            <a:srgbClr val="E0883B"/>
+          </a:solidFill>
+          <a:ln>
+            <a:noFill/>
+          </a:ln>
+          <a:effectLst/>
+        </p:spPr>
+        <p:style>
+          <a:lnRef idx="1">
+            <a:schemeClr val="accent1"/>
+          </a:lnRef>
+          <a:fillRef idx="3">
+            <a:schemeClr val="accent1"/>
+          </a:fillRef>
+          <a:effectRef idx="2">
+            <a:schemeClr val="accent1"/>
+          </a:effectRef>
+          <a:fontRef idx="minor">
+            <a:schemeClr val="lt1"/>
+          </a:fontRef>
+        </p:style>
+        <p:txBody>
+          <a:bodyPr wrap="none" lIns="0" tIns="0" rIns="0" bIns="0" rtlCol="0" anchor="ctr"/>
+          <a:lstStyle/>
+          <a:p>
+            <a:pPr algn="ctr"/>
+            <a:r>
+              <a:rPr lang="en-US" altLang="zh-TW" sz="1400" b="1" dirty="0">
+                <a:solidFill>
+                  <a:srgbClr val="FFFFFF"/>
+                </a:solidFill>
+                <a:latin typeface="微軟正黑體"/>
+                <a:ea typeface="微軟正黑體"/>
+                <a:cs typeface="微軟正黑體"/>
+              </a:rPr>
+              <a:t>4</a:t>
+            </a:r>
+            <a:endParaRPr sz="1400" b="1" dirty="0">
+              <a:solidFill>
+                <a:srgbClr val="FFFFFF"/>
+              </a:solidFill>
+              <a:latin typeface="微軟正黑體"/>
+              <a:ea typeface="微軟正黑體"/>
+              <a:cs typeface="微軟正黑體"/>
+            </a:endParaRPr>
+          </a:p>
+        </p:txBody>
+      </p:sp>
+      <p:sp>
+        <p:nvSpPr>
+          <p:cNvPr id="5" name="Oval 4">
+            <a:extLst>
+              <a:ext uri="{FF2B5EF4-FFF2-40B4-BE49-F238E27FC236}">
+                <a16:creationId xmlns:a16="http://schemas.microsoft.com/office/drawing/2014/main" id="{D71DEDDD-D045-4F99-B8AB-FD6486AE8ECC}"/>
+              </a:ext>
+            </a:extLst>
+          </p:cNvPr>
+          <p:cNvSpPr/>
+          <p:nvPr/>
+        </p:nvSpPr>
+        <p:spPr>
+          <a:xfrm>
+            <a:off x="4657200" y="5928769"/>
+            <a:ext cx="347472" cy="347472"/>
+          </a:xfrm>
+          <a:prstGeom prst="ellipse">
+            <a:avLst/>
+          </a:prstGeom>
+          <a:solidFill>
+            <a:srgbClr val="E0883B"/>
+          </a:solidFill>
+          <a:ln>
+            <a:noFill/>
+          </a:ln>
+          <a:effectLst/>
+        </p:spPr>
+        <p:style>
+          <a:lnRef idx="1">
+            <a:schemeClr val="accent1"/>
+          </a:lnRef>
+          <a:fillRef idx="3">
+            <a:schemeClr val="accent1"/>
+          </a:fillRef>
+          <a:effectRef idx="2">
+            <a:schemeClr val="accent1"/>
+          </a:effectRef>
+          <a:fontRef idx="minor">
+            <a:schemeClr val="lt1"/>
+          </a:fontRef>
+        </p:style>
+        <p:txBody>
+          <a:bodyPr wrap="none" lIns="0" tIns="0" rIns="0" bIns="0" rtlCol="0" anchor="ctr"/>
+          <a:lstStyle/>
+          <a:p>
+            <a:pPr algn="ctr"/>
+            <a:r>
+              <a:rPr lang="en-US" altLang="zh-TW" sz="1400" b="1" dirty="0">
+                <a:solidFill>
+                  <a:srgbClr val="FFFFFF"/>
+                </a:solidFill>
+                <a:latin typeface="微軟正黑體"/>
+                <a:ea typeface="微軟正黑體"/>
+                <a:cs typeface="微軟正黑體"/>
+              </a:rPr>
+              <a:t>5</a:t>
+            </a:r>
+            <a:endParaRPr sz="1400" b="1" dirty="0">
+              <a:solidFill>
+                <a:srgbClr val="FFFFFF"/>
+              </a:solidFill>
+              <a:latin typeface="微軟正黑體"/>
+              <a:ea typeface="微軟正黑體"/>
+              <a:cs typeface="微軟正黑體"/>
+            </a:endParaRPr>
           </a:p>
         </p:txBody>
       </p:sp>
@@ -6328,7 +6365,7 @@
           <a:lstStyle/>
           <a:p>
             <a:r>
-              <a:rPr sz="1600">
+              <a:rPr sz="1600" dirty="0" err="1">
                 <a:solidFill>
                   <a:srgbClr val="757575"/>
                 </a:solidFill>
@@ -6336,8 +6373,16 @@
                 <a:ea typeface="微軟正黑體"/>
                 <a:cs typeface="微軟正黑體"/>
               </a:rPr>
-              <a:t>個管師／護理師平時不需要碰裝置</a:t>
-            </a:r>
+              <a:t>個管師／護理師平時不需要碰 SmartGateway</a:t>
+            </a:r>
+            <a:endParaRPr sz="1600" dirty="0">
+              <a:solidFill>
+                <a:srgbClr val="757575"/>
+              </a:solidFill>
+              <a:latin typeface="微軟正黑體"/>
+              <a:ea typeface="微軟正黑體"/>
+              <a:cs typeface="微軟正黑體"/>
+            </a:endParaRPr>
           </a:p>
         </p:txBody>
       </p:sp>
@@ -6698,7 +6743,7 @@
           <a:p>
             <a:pPr algn="ctr"/>
             <a:r>
-              <a:rPr sz="1250" b="1">
+              <a:rPr sz="1250" b="1" dirty="0" err="1">
                 <a:solidFill>
                   <a:srgbClr val="333333"/>
                 </a:solidFill>
@@ -6706,8 +6751,16 @@
                 <a:ea typeface="微軟正黑體"/>
                 <a:cs typeface="微軟正黑體"/>
               </a:rPr>
-              <a:t>裝置自動連線收值</a:t>
-            </a:r>
+              <a:t>SmartGateway 自動連線收值</a:t>
+            </a:r>
+            <a:endParaRPr sz="1250" b="1" dirty="0">
+              <a:solidFill>
+                <a:srgbClr val="333333"/>
+              </a:solidFill>
+              <a:latin typeface="微軟正黑體"/>
+              <a:ea typeface="微軟正黑體"/>
+              <a:cs typeface="微軟正黑體"/>
+            </a:endParaRPr>
           </a:p>
         </p:txBody>
       </p:sp>
@@ -6988,7 +7041,7 @@
           <a:p>
             <a:pPr algn="ctr"/>
             <a:r>
-              <a:rPr sz="1200" b="1">
+              <a:rPr sz="1200" b="1" dirty="0">
                 <a:solidFill>
                   <a:srgbClr val="333333"/>
                 </a:solidFill>
@@ -6996,7 +7049,29 @@
                 <a:ea typeface="微軟正黑體"/>
                 <a:cs typeface="微軟正黑體"/>
               </a:rPr>
-              <a:t>① 日常量測（常駐畫面）</a:t>
+              <a:t>① </a:t>
+            </a:r>
+            <a:r>
+              <a:rPr sz="1200" b="1" dirty="0" err="1">
+                <a:solidFill>
+                  <a:srgbClr val="333333"/>
+                </a:solidFill>
+                <a:latin typeface="微軟正黑體"/>
+                <a:ea typeface="微軟正黑體"/>
+                <a:cs typeface="微軟正黑體"/>
+              </a:rPr>
+              <a:t>日常量測（常駐畫面</a:t>
+            </a:r>
+            <a:r>
+              <a:rPr sz="1200" b="1" dirty="0">
+                <a:solidFill>
+                  <a:srgbClr val="333333"/>
+                </a:solidFill>
+                <a:latin typeface="微軟正黑體"/>
+                <a:ea typeface="微軟正黑體"/>
+                <a:cs typeface="微軟正黑體"/>
+              </a:rPr>
+              <a:t>）</a:t>
             </a:r>
           </a:p>
         </p:txBody>
@@ -7777,51 +7852,7 @@
                 <a:ea typeface="微軟正黑體"/>
                 <a:cs typeface="微軟正黑體"/>
               </a:rPr>
-              <a:t>1  </a:t>
-            </a:r>
-            <a:r>
-              <a:rPr sz="1150" b="1" dirty="0" err="1">
-                <a:solidFill>
-                  <a:srgbClr val="333333"/>
-                </a:solidFill>
-                <a:latin typeface="微軟正黑體"/>
-                <a:ea typeface="微軟正黑體"/>
-                <a:cs typeface="微軟正黑體"/>
-              </a:rPr>
-              <a:t>個案編號＋目前狀態（含</a:t>
-            </a:r>
-            <a:r>
-              <a:rPr lang="zh-TW" altLang="en-US" sz="1150" b="1" dirty="0">
-                <a:solidFill>
-                  <a:srgbClr val="333333"/>
-                </a:solidFill>
-                <a:latin typeface="微軟正黑體"/>
-                <a:ea typeface="微軟正黑體"/>
-                <a:cs typeface="微軟正黑體"/>
-              </a:rPr>
-              <a:t>最後掃描</a:t>
-            </a:r>
-            <a:r>
-              <a:rPr sz="1150" b="1" dirty="0" err="1">
-                <a:solidFill>
-                  <a:srgbClr val="333333"/>
-                </a:solidFill>
-                <a:latin typeface="微軟正黑體"/>
-                <a:ea typeface="微軟正黑體"/>
-                <a:cs typeface="微軟正黑體"/>
-              </a:rPr>
-              <a:t>時間，證明裝置還活著</a:t>
-            </a:r>
-            <a:r>
-              <a:rPr sz="1150" b="1" dirty="0">
-                <a:solidFill>
-                  <a:srgbClr val="333333"/>
-                </a:solidFill>
-                <a:latin typeface="微軟正黑體"/>
-                <a:ea typeface="微軟正黑體"/>
-                <a:cs typeface="微軟正黑體"/>
-              </a:rPr>
-              <a:t>）</a:t>
+              <a:t>1  個案編號＋目前狀態（含最後掃描時間，證明 SmartGateway 還活著）</a:t>
             </a:r>
           </a:p>
           <a:p>
@@ -8175,7 +8206,7 @@
         </p:nvSpPr>
         <p:spPr>
           <a:xfrm>
-            <a:off x="457200" y="6492240"/>
+            <a:off x="457200" y="6341050"/>
             <a:ext cx="8229600" cy="274320"/>
           </a:xfrm>
           <a:prstGeom prst="rect">
@@ -8214,7 +8245,7 @@
         </p:nvGraphicFramePr>
         <p:xfrm>
           <a:off x="457200" y="3855103"/>
-          <a:ext cx="8229600" cy="620000"/>
+          <a:ext cx="8229600" cy="899160"/>
         </p:xfrm>
         <a:graphic>
           <a:graphicData uri="http://schemas.openxmlformats.org/drawingml/2006/table">
@@ -8223,17 +8254,29 @@
                 <a:tableStyleId>{5C22544A-7EE6-4342-B048-85BDC9FD1C3A}</a:tableStyleId>
               </a:tblPr>
               <a:tblGrid>
-                <a:gridCol w="2400000"/>
-                <a:gridCol w="5829600"/>
+                <a:gridCol w="2400000">
+                  <a:extLst>
+                    <a:ext uri="{9D8B030D-6E8A-4147-A177-3AD203B41FA5}">
+                      <a16:colId xmlns:a16="http://schemas.microsoft.com/office/drawing/2014/main" val="20000"/>
+                    </a:ext>
+                  </a:extLst>
+                </a:gridCol>
+                <a:gridCol w="5829600">
+                  <a:extLst>
+                    <a:ext uri="{9D8B030D-6E8A-4147-A177-3AD203B41FA5}">
+                      <a16:colId xmlns:a16="http://schemas.microsoft.com/office/drawing/2014/main" val="20001"/>
+                    </a:ext>
+                  </a:extLst>
+                </a:gridCol>
               </a:tblGrid>
               <a:tr h="206666">
                 <a:tc>
                   <a:txBody>
-                    <a:bodyPr wrap="square"/>
+                    <a:bodyPr/>
                     <a:lstStyle/>
                     <a:p>
                       <a:r>
-                        <a:rPr sz="1100" b="1">
+                        <a:rPr sz="1100" b="1" dirty="0" err="1">
                           <a:solidFill>
                             <a:srgbClr val="134349"/>
                           </a:solidFill>
@@ -8241,15 +8284,23 @@
                           <a:ea typeface="微軟正黑體"/>
                           <a:cs typeface="微軟正黑體"/>
                         </a:rPr>
-                        <a:t>裝置</a:t>
+                        <a:t>醫材</a:t>
                       </a:r>
+                      <a:endParaRPr sz="1100" b="1" dirty="0">
+                        <a:solidFill>
+                          <a:srgbClr val="134349"/>
+                        </a:solidFill>
+                        <a:latin typeface="微軟正黑體"/>
+                        <a:ea typeface="微軟正黑體"/>
+                        <a:cs typeface="微軟正黑體"/>
+                      </a:endParaRPr>
                     </a:p>
                   </a:txBody>
                   <a:tcPr/>
                 </a:tc>
                 <a:tc>
                   <a:txBody>
-                    <a:bodyPr wrap="square"/>
+                    <a:bodyPr/>
                     <a:lstStyle/>
                     <a:p>
                       <a:r>
@@ -8267,11 +8318,16 @@
                   </a:txBody>
                   <a:tcPr/>
                 </a:tc>
+                <a:extLst>
+                  <a:ext uri="{0D108BD9-81ED-4DB2-BD59-A6C34878D82A}">
+                    <a16:rowId xmlns:a16="http://schemas.microsoft.com/office/drawing/2014/main" val="10000"/>
+                  </a:ext>
+                </a:extLst>
               </a:tr>
               <a:tr h="206666">
                 <a:tc>
                   <a:txBody>
-                    <a:bodyPr wrap="square"/>
+                    <a:bodyPr/>
                     <a:lstStyle/>
                     <a:p>
                       <a:r>
@@ -8291,7 +8347,7 @@
                 </a:tc>
                 <a:tc>
                   <a:txBody>
-                    <a:bodyPr wrap="square"/>
+                    <a:bodyPr/>
                     <a:lstStyle/>
                     <a:p>
                       <a:r>
@@ -8303,17 +8359,22 @@
                           <a:ea typeface="微軟正黑體"/>
                           <a:cs typeface="微軟正黑體"/>
                         </a:rPr>
-                        <a:t>中繼器收到時間</a:t>
+                        <a:t>SmartGateway 收到時間</a:t>
                       </a:r>
                     </a:p>
                   </a:txBody>
                   <a:tcPr/>
                 </a:tc>
+                <a:extLst>
+                  <a:ext uri="{0D108BD9-81ED-4DB2-BD59-A6C34878D82A}">
+                    <a16:rowId xmlns:a16="http://schemas.microsoft.com/office/drawing/2014/main" val="10001"/>
+                  </a:ext>
+                </a:extLst>
               </a:tr>
               <a:tr h="206668">
                 <a:tc>
                   <a:txBody>
-                    <a:bodyPr wrap="square"/>
+                    <a:bodyPr/>
                     <a:lstStyle/>
                     <a:p>
                       <a:r>
@@ -8333,11 +8394,11 @@
                 </a:tc>
                 <a:tc>
                   <a:txBody>
-                    <a:bodyPr wrap="square"/>
+                    <a:bodyPr/>
                     <a:lstStyle/>
                     <a:p>
                       <a:r>
-                        <a:rPr sz="1000" b="0">
+                        <a:rPr sz="1000" b="0" dirty="0">
                           <a:solidFill>
                             <a:srgbClr val="333333"/>
                           </a:solidFill>
@@ -8345,12 +8406,12 @@
                           <a:ea typeface="微軟正黑體"/>
                           <a:cs typeface="微軟正黑體"/>
                         </a:rPr>
-                        <a:t>1. 優先用裝置自己的量測時間</a:t>
+                        <a:t>1. 優先用醫材自己的量測時間</a:t>
                       </a:r>
                     </a:p>
                     <a:p>
                       <a:r>
-                        <a:rPr sz="1000" b="0">
+                        <a:rPr sz="1000" b="0" dirty="0">
                           <a:solidFill>
                             <a:srgbClr val="333333"/>
                           </a:solidFill>
@@ -8358,12 +8419,17 @@
                           <a:ea typeface="微軟正黑體"/>
                           <a:cs typeface="微軟正黑體"/>
                         </a:rPr>
-                        <a:t>2. 差超過 7 天，改用中繼器收到時間</a:t>
+                        <a:t>2. 差超過 7 天，改用SmartGateway 收到時間</a:t>
                       </a:r>
                     </a:p>
                   </a:txBody>
                   <a:tcPr/>
                 </a:tc>
+                <a:extLst>
+                  <a:ext uri="{0D108BD9-81ED-4DB2-BD59-A6C34878D82A}">
+                    <a16:rowId xmlns:a16="http://schemas.microsoft.com/office/drawing/2014/main" val="10002"/>
+                  </a:ext>
+                </a:extLst>
               </a:tr>
             </a:tbl>
           </a:graphicData>
@@ -8728,7 +8794,7 @@
           <a:p>
             <a:pPr algn="ctr"/>
             <a:r>
-              <a:rPr sz="1300" b="1">
+              <a:rPr sz="1300" b="1" dirty="0" err="1">
                 <a:solidFill>
                   <a:srgbClr val="333333"/>
                 </a:solidFill>
@@ -8736,8 +8802,16 @@
                 <a:ea typeface="微軟正黑體"/>
                 <a:cs typeface="微軟正黑體"/>
               </a:rPr>
-              <a:t>裝置開始廣播</a:t>
-            </a:r>
+              <a:t>醫材開始廣播</a:t>
+            </a:r>
+            <a:endParaRPr sz="1300" b="1" dirty="0">
+              <a:solidFill>
+                <a:srgbClr val="333333"/>
+              </a:solidFill>
+              <a:latin typeface="微軟正黑體"/>
+              <a:ea typeface="微軟正黑體"/>
+              <a:cs typeface="微軟正黑體"/>
+            </a:endParaRPr>
           </a:p>
           <a:p>
             <a:pPr>
@@ -8746,7 +8820,7 @@
               </a:spcBef>
             </a:pPr>
             <a:r>
-              <a:rPr sz="1100" b="0">
+              <a:rPr sz="1100" b="0" dirty="0" err="1">
                 <a:solidFill>
                   <a:srgbClr val="757575"/>
                 </a:solidFill>
@@ -8754,7 +8828,18 @@
                 <a:ea typeface="微軟正黑體"/>
                 <a:cs typeface="微軟正黑體"/>
               </a:rPr>
-              <a:t>量測完成後才會開啟藍牙（螢幕出現藍牙圖示，如左圖）</a:t>
+              <a:t>量測完成後才會開啟藍牙（螢幕出現藍牙圖示，如左圖</a:t>
+            </a:r>
+            <a:r>
+              <a:rPr sz="1100" b="0" dirty="0">
+                <a:solidFill>
+                  <a:srgbClr val="757575"/>
+                </a:solidFill>
+                <a:latin typeface="微軟正黑體"/>
+                <a:ea typeface="微軟正黑體"/>
+                <a:cs typeface="微軟正黑體"/>
+              </a:rPr>
+              <a:t>）</a:t>
             </a:r>
           </a:p>
         </p:txBody>
@@ -8866,7 +8951,7 @@
                 <a:ea typeface="微軟正黑體"/>
                 <a:cs typeface="微軟正黑體"/>
               </a:rPr>
-              <a:t>中繼器自動抓取</a:t>
+              <a:t>SmartGateway 自動抓取</a:t>
             </a:r>
           </a:p>
           <a:p>
@@ -8884,7 +8969,7 @@
                 <a:ea typeface="微軟正黑體"/>
                 <a:cs typeface="微軟正黑體"/>
               </a:rPr>
-              <a:t>中繼器在範圍內就會自動連線收下這筆體溫，不用手動操作</a:t>
+              <a:t>SmartGateway 在範圍內就會自動連線收下這筆體溫，不用手動操作</a:t>
             </a:r>
           </a:p>
         </p:txBody>
@@ -8988,7 +9073,7 @@
           <a:p>
             <a:pPr algn="ctr"/>
             <a:r>
-              <a:rPr sz="1300" b="1">
+              <a:rPr sz="1300" b="1" dirty="0" err="1">
                 <a:solidFill>
                   <a:srgbClr val="333333"/>
                 </a:solidFill>
@@ -8996,8 +9081,16 @@
                 <a:ea typeface="微軟正黑體"/>
                 <a:cs typeface="微軟正黑體"/>
               </a:rPr>
-              <a:t>裝置約 1 分鐘後自動關機</a:t>
-            </a:r>
+              <a:t>醫材約 1 分鐘後自動關機</a:t>
+            </a:r>
+            <a:endParaRPr sz="1300" b="1" dirty="0">
+              <a:solidFill>
+                <a:srgbClr val="333333"/>
+              </a:solidFill>
+              <a:latin typeface="微軟正黑體"/>
+              <a:ea typeface="微軟正黑體"/>
+              <a:cs typeface="微軟正黑體"/>
+            </a:endParaRPr>
           </a:p>
           <a:p>
             <a:pPr>
@@ -9006,7 +9099,7 @@
               </a:spcBef>
             </a:pPr>
             <a:r>
-              <a:rPr sz="1100" b="0">
+              <a:rPr sz="1100" b="0" dirty="0" err="1">
                 <a:solidFill>
                   <a:srgbClr val="757575"/>
                 </a:solidFill>
@@ -9014,8 +9107,16 @@
                 <a:ea typeface="微軟正黑體"/>
                 <a:cs typeface="微軟正黑體"/>
               </a:rPr>
-              <a:t>若這段時間內中繼器沒連上，裝置會關機、藍牙跟著關閉，這筆數值不會被收到，需要重新量測一次</a:t>
-            </a:r>
+              <a:t>若這段時間內 SmartGateway 沒連上，醫材會關機、藍牙跟著關閉，這筆數值不會被收到，需要重新量測一次</a:t>
+            </a:r>
+            <a:endParaRPr sz="1100" b="0" dirty="0">
+              <a:solidFill>
+                <a:srgbClr val="757575"/>
+              </a:solidFill>
+              <a:latin typeface="微軟正黑體"/>
+              <a:ea typeface="微軟正黑體"/>
+              <a:cs typeface="微軟正黑體"/>
+            </a:endParaRPr>
           </a:p>
         </p:txBody>
       </p:sp>
@@ -9405,7 +9506,7 @@
           <a:p>
             <a:pPr algn="ctr"/>
             <a:r>
-              <a:rPr sz="1300" b="1">
+              <a:rPr sz="1300" b="1" dirty="0" err="1">
                 <a:solidFill>
                   <a:srgbClr val="333333"/>
                 </a:solidFill>
@@ -9413,8 +9514,16 @@
                 <a:ea typeface="微軟正黑體"/>
                 <a:cs typeface="微軟正黑體"/>
               </a:rPr>
-              <a:t>裝置開始廣播</a:t>
-            </a:r>
+              <a:t>醫材開始廣播</a:t>
+            </a:r>
+            <a:endParaRPr sz="1300" b="1" dirty="0">
+              <a:solidFill>
+                <a:srgbClr val="333333"/>
+              </a:solidFill>
+              <a:latin typeface="微軟正黑體"/>
+              <a:ea typeface="微軟正黑體"/>
+              <a:cs typeface="微軟正黑體"/>
+            </a:endParaRPr>
           </a:p>
           <a:p>
             <a:pPr>
@@ -9423,7 +9532,7 @@
               </a:spcBef>
             </a:pPr>
             <a:r>
-              <a:rPr sz="1100" b="0">
+              <a:rPr sz="1100" b="0" dirty="0" err="1">
                 <a:solidFill>
                   <a:srgbClr val="757575"/>
                 </a:solidFill>
@@ -9431,7 +9540,18 @@
                 <a:ea typeface="微軟正黑體"/>
                 <a:cs typeface="微軟正黑體"/>
               </a:rPr>
-              <a:t>夾上手指後就會持續開啟藍牙（機身藍燈亮起，如左圖）</a:t>
+              <a:t>夾上手指後就會持續開啟藍牙（機身藍燈亮起，如左圖</a:t>
+            </a:r>
+            <a:r>
+              <a:rPr sz="1100" b="0" dirty="0">
+                <a:solidFill>
+                  <a:srgbClr val="757575"/>
+                </a:solidFill>
+                <a:latin typeface="微軟正黑體"/>
+                <a:ea typeface="微軟正黑體"/>
+                <a:cs typeface="微軟正黑體"/>
+              </a:rPr>
+              <a:t>）</a:t>
             </a:r>
           </a:p>
         </p:txBody>
@@ -9543,7 +9663,7 @@
                 <a:ea typeface="微軟正黑體"/>
                 <a:cs typeface="微軟正黑體"/>
               </a:rPr>
-              <a:t>中繼器自動抓取</a:t>
+              <a:t>SmartGateway 自動抓取</a:t>
             </a:r>
           </a:p>
           <a:p>
@@ -9665,7 +9785,7 @@
           <a:p>
             <a:pPr algn="ctr"/>
             <a:r>
-              <a:rPr sz="1300" b="1">
+              <a:rPr sz="1300" b="1" dirty="0" err="1">
                 <a:solidFill>
                   <a:srgbClr val="333333"/>
                 </a:solidFill>
@@ -9673,8 +9793,38 @@
                 <a:ea typeface="微軟正黑體"/>
                 <a:cs typeface="微軟正黑體"/>
               </a:rPr>
-              <a:t>記錄完成後 90 秒內不會開始新一輪觀察</a:t>
-            </a:r>
+              <a:t>記錄完成後</a:t>
+            </a:r>
+            <a:r>
+              <a:rPr sz="1300" b="1" dirty="0">
+                <a:solidFill>
+                  <a:srgbClr val="333333"/>
+                </a:solidFill>
+                <a:latin typeface="微軟正黑體"/>
+                <a:ea typeface="微軟正黑體"/>
+                <a:cs typeface="微軟正黑體"/>
+              </a:rPr>
+              <a:t> 90 </a:t>
+            </a:r>
+            <a:r>
+              <a:rPr sz="1300" b="1" dirty="0" err="1">
+                <a:solidFill>
+                  <a:srgbClr val="333333"/>
+                </a:solidFill>
+                <a:latin typeface="微軟正黑體"/>
+                <a:ea typeface="微軟正黑體"/>
+                <a:cs typeface="微軟正黑體"/>
+              </a:rPr>
+              <a:t>秒內不會開始新一輪觀察</a:t>
+            </a:r>
+            <a:endParaRPr sz="1300" b="1" dirty="0">
+              <a:solidFill>
+                <a:srgbClr val="333333"/>
+              </a:solidFill>
+              <a:latin typeface="微軟正黑體"/>
+              <a:ea typeface="微軟正黑體"/>
+              <a:cs typeface="微軟正黑體"/>
+            </a:endParaRPr>
           </a:p>
           <a:p>
             <a:pPr>
@@ -9683,7 +9833,7 @@
               </a:spcBef>
             </a:pPr>
             <a:r>
-              <a:rPr sz="1100" b="0">
+              <a:rPr sz="1100" b="0" dirty="0" err="1">
                 <a:solidFill>
                   <a:srgbClr val="757575"/>
                 </a:solidFill>
@@ -9691,8 +9841,16 @@
                 <a:ea typeface="微軟正黑體"/>
                 <a:cs typeface="微軟正黑體"/>
               </a:rPr>
-              <a:t>避免剛記錄完又立刻重新觀察；手指移開後裝置本身也會在約 15 秒內自動關機</a:t>
-            </a:r>
+              <a:t>避免剛記錄完又立刻重新觀察；手指移開後醫材本身也會在約 15 秒內自動關機</a:t>
+            </a:r>
+            <a:endParaRPr sz="1100" b="0" dirty="0">
+              <a:solidFill>
+                <a:srgbClr val="757575"/>
+              </a:solidFill>
+              <a:latin typeface="微軟正黑體"/>
+              <a:ea typeface="微軟正黑體"/>
+              <a:cs typeface="微軟正黑體"/>
+            </a:endParaRPr>
           </a:p>
         </p:txBody>
       </p:sp>
@@ -9858,7 +10016,7 @@
                 <a:ea typeface="微軟正黑體"/>
                 <a:cs typeface="微軟正黑體"/>
               </a:rPr>
-              <a:t>訊號塔圖示：螢幕右上角，裝置型號旁</a:t>
+              <a:t>訊號塔圖示：螢幕右上角，醫材型號旁</a:t>
             </a:r>
             <a:endParaRPr sz="1200" b="0" dirty="0">
               <a:solidFill>
@@ -10090,7 +10248,7 @@
           <a:p>
             <a:pPr algn="ctr"/>
             <a:r>
-              <a:rPr sz="1300" b="1">
+              <a:rPr sz="1300" b="1" dirty="0" err="1">
                 <a:solidFill>
                   <a:srgbClr val="333333"/>
                 </a:solidFill>
@@ -10098,8 +10256,16 @@
                 <a:ea typeface="微軟正黑體"/>
                 <a:cs typeface="微軟正黑體"/>
               </a:rPr>
-              <a:t>裝置開始廣播</a:t>
-            </a:r>
+              <a:t>醫材開始廣播</a:t>
+            </a:r>
+            <a:endParaRPr sz="1300" b="1" dirty="0">
+              <a:solidFill>
+                <a:srgbClr val="333333"/>
+              </a:solidFill>
+              <a:latin typeface="微軟正黑體"/>
+              <a:ea typeface="微軟正黑體"/>
+              <a:cs typeface="微軟正黑體"/>
+            </a:endParaRPr>
           </a:p>
           <a:p>
             <a:pPr>
@@ -10108,7 +10274,7 @@
               </a:spcBef>
             </a:pPr>
             <a:r>
-              <a:rPr sz="1100" b="0">
+              <a:rPr sz="1100" b="0" dirty="0" err="1">
                 <a:solidFill>
                   <a:srgbClr val="757575"/>
                 </a:solidFill>
@@ -10116,7 +10282,18 @@
                 <a:ea typeface="微軟正黑體"/>
                 <a:cs typeface="微軟正黑體"/>
               </a:rPr>
-              <a:t>量測完成後才會開啟藍牙（螢幕右上角的訊號塔圖示會亮起，如左圖）</a:t>
+              <a:t>量測完成後才會開啟藍牙（螢幕右上角的訊號塔圖示會亮起，如左圖</a:t>
+            </a:r>
+            <a:r>
+              <a:rPr sz="1100" b="0" dirty="0">
+                <a:solidFill>
+                  <a:srgbClr val="757575"/>
+                </a:solidFill>
+                <a:latin typeface="微軟正黑體"/>
+                <a:ea typeface="微軟正黑體"/>
+                <a:cs typeface="微軟正黑體"/>
+              </a:rPr>
+              <a:t>）</a:t>
             </a:r>
           </a:p>
         </p:txBody>
@@ -10228,7 +10405,7 @@
                 <a:ea typeface="微軟正黑體"/>
                 <a:cs typeface="微軟正黑體"/>
               </a:rPr>
-              <a:t>中繼器自動抓取</a:t>
+              <a:t>SmartGateway 自動抓取</a:t>
             </a:r>
           </a:p>
           <a:p>
@@ -10246,7 +10423,7 @@
                 <a:ea typeface="微軟正黑體"/>
                 <a:cs typeface="微軟正黑體"/>
               </a:rPr>
-              <a:t>中繼器在範圍內就會自動連線收下這筆血壓，紀錄的時間是實際量測當下，不是連線當下，不用手動操作</a:t>
+              <a:t>SmartGateway 在範圍內就會自動連線收下這筆血壓，紀錄的時間是實際量測當下，不是連線當下，不用手動操作</a:t>
             </a:r>
           </a:p>
         </p:txBody>
@@ -10350,7 +10527,7 @@
           <a:p>
             <a:pPr algn="ctr"/>
             <a:r>
-              <a:rPr sz="1300" b="1">
+              <a:rPr sz="1300" b="1" dirty="0" err="1">
                 <a:solidFill>
                   <a:srgbClr val="333333"/>
                 </a:solidFill>
@@ -10358,8 +10535,16 @@
                 <a:ea typeface="微軟正黑體"/>
                 <a:cs typeface="微軟正黑體"/>
               </a:rPr>
-              <a:t>裝置約 3 分鐘後自動關機</a:t>
-            </a:r>
+              <a:t>醫材約 3 分鐘後自動關機</a:t>
+            </a:r>
+            <a:endParaRPr sz="1300" b="1" dirty="0">
+              <a:solidFill>
+                <a:srgbClr val="333333"/>
+              </a:solidFill>
+              <a:latin typeface="微軟正黑體"/>
+              <a:ea typeface="微軟正黑體"/>
+              <a:cs typeface="微軟正黑體"/>
+            </a:endParaRPr>
           </a:p>
           <a:p>
             <a:pPr>
@@ -10368,7 +10553,7 @@
               </a:spcBef>
             </a:pPr>
             <a:r>
-              <a:rPr sz="1100" b="0">
+              <a:rPr sz="1100" b="0" dirty="0" err="1">
                 <a:solidFill>
                   <a:srgbClr val="757575"/>
                 </a:solidFill>
@@ -10376,8 +10561,16 @@
                 <a:ea typeface="微軟正黑體"/>
                 <a:cs typeface="微軟正黑體"/>
               </a:rPr>
-              <a:t>就算這段時間內中繼器沒連上也不會遺失：裝置會記住，下次中繼器連線時自動往回補抓回來</a:t>
-            </a:r>
+              <a:t>就算這段時間內 SmartGateway 沒連上也不會遺失：醫材會記住，下次 SmartGateway 連線時自動往回補抓回來</a:t>
+            </a:r>
+            <a:endParaRPr sz="1100" b="0" dirty="0">
+              <a:solidFill>
+                <a:srgbClr val="757575"/>
+              </a:solidFill>
+              <a:latin typeface="微軟正黑體"/>
+              <a:ea typeface="微軟正黑體"/>
+              <a:cs typeface="微軟正黑體"/>
+            </a:endParaRPr>
           </a:p>
         </p:txBody>
       </p:sp>
@@ -10767,7 +10960,7 @@
           <a:p>
             <a:pPr algn="ctr"/>
             <a:r>
-              <a:rPr sz="1300" b="1">
+              <a:rPr sz="1300" b="1" dirty="0" err="1">
                 <a:solidFill>
                   <a:srgbClr val="333333"/>
                 </a:solidFill>
@@ -10775,8 +10968,16 @@
                 <a:ea typeface="微軟正黑體"/>
                 <a:cs typeface="微軟正黑體"/>
               </a:rPr>
-              <a:t>裝置開始廣播</a:t>
-            </a:r>
+              <a:t>醫材開始廣播</a:t>
+            </a:r>
+            <a:endParaRPr sz="1300" b="1" dirty="0">
+              <a:solidFill>
+                <a:srgbClr val="333333"/>
+              </a:solidFill>
+              <a:latin typeface="微軟正黑體"/>
+              <a:ea typeface="微軟正黑體"/>
+              <a:cs typeface="微軟正黑體"/>
+            </a:endParaRPr>
           </a:p>
           <a:p>
             <a:pPr>
@@ -10785,7 +10986,7 @@
               </a:spcBef>
             </a:pPr>
             <a:r>
-              <a:rPr sz="1100" b="0">
+              <a:rPr sz="1100" b="0" dirty="0" err="1">
                 <a:solidFill>
                   <a:srgbClr val="757575"/>
                 </a:solidFill>
@@ -10793,7 +10994,18 @@
                 <a:ea typeface="微軟正黑體"/>
                 <a:cs typeface="微軟正黑體"/>
               </a:rPr>
-              <a:t>量測完成後才會開啟藍牙（機身藍燈亮起，如左圖）</a:t>
+              <a:t>量測完成後才會開啟藍牙（機身藍燈亮起，如左圖</a:t>
+            </a:r>
+            <a:r>
+              <a:rPr sz="1100" b="0" dirty="0">
+                <a:solidFill>
+                  <a:srgbClr val="757575"/>
+                </a:solidFill>
+                <a:latin typeface="微軟正黑體"/>
+                <a:ea typeface="微軟正黑體"/>
+                <a:cs typeface="微軟正黑體"/>
+              </a:rPr>
+              <a:t>）</a:t>
             </a:r>
           </a:p>
         </p:txBody>
@@ -10905,7 +11117,7 @@
                 <a:ea typeface="微軟正黑體"/>
                 <a:cs typeface="微軟正黑體"/>
               </a:rPr>
-              <a:t>中繼器自動抓取</a:t>
+              <a:t>SmartGateway 自動抓取</a:t>
             </a:r>
           </a:p>
           <a:p>
@@ -10923,7 +11135,7 @@
                 <a:ea typeface="微軟正黑體"/>
                 <a:cs typeface="微軟正黑體"/>
               </a:rPr>
-              <a:t>中繼器在範圍內就會自動連線收下這筆數值，紀錄的時間是實際量測當下，不是連線當下，不用手動操作</a:t>
+              <a:t>SmartGateway 在範圍內就會自動連線收下這筆數值，紀錄的時間是實際量測當下，不是連線當下，不用手動操作</a:t>
             </a:r>
           </a:p>
         </p:txBody>
@@ -11027,7 +11239,7 @@
           <a:p>
             <a:pPr algn="ctr"/>
             <a:r>
-              <a:rPr sz="1300" b="1">
+              <a:rPr sz="1300" b="1" dirty="0" err="1">
                 <a:solidFill>
                   <a:srgbClr val="333333"/>
                 </a:solidFill>
@@ -11037,6 +11249,14 @@
               </a:rPr>
               <a:t>資料傳完後自動關機</a:t>
             </a:r>
+            <a:endParaRPr sz="1300" b="1" dirty="0">
+              <a:solidFill>
+                <a:srgbClr val="333333"/>
+              </a:solidFill>
+              <a:latin typeface="微軟正黑體"/>
+              <a:ea typeface="微軟正黑體"/>
+              <a:cs typeface="微軟正黑體"/>
+            </a:endParaRPr>
           </a:p>
           <a:p>
             <a:pPr>
@@ -11045,7 +11265,7 @@
               </a:spcBef>
             </a:pPr>
             <a:r>
-              <a:rPr sz="1100" b="0">
+              <a:rPr sz="1100" b="0" dirty="0">
                 <a:solidFill>
                   <a:srgbClr val="757575"/>
                 </a:solidFill>
@@ -11053,7 +11273,7 @@
                 <a:ea typeface="微軟正黑體"/>
                 <a:cs typeface="微軟正黑體"/>
               </a:rPr>
-              <a:t>抓到資料、傳輸完成後裝置就會自動關閉，不用等固定時間；就算一直沒連上也不會遺失，下次連線時會自動往回補抓，但建議盡快讓中繼器在範圍內</a:t>
+              <a:t>抓到資料、傳輸完成後醫材就會自動關閉，不用等固定時間；就算一直沒連上也不會遺失，下次連線時會自動往回補抓，但建議盡快讓 SmartGateway 在範圍內</a:t>
             </a:r>
           </a:p>
         </p:txBody>
@@ -11205,7 +11425,7 @@
                 <a:ea typeface="微軟正黑體"/>
                 <a:cs typeface="微軟正黑體"/>
               </a:rPr>
-              <a:t>一、認識裝置</a:t>
+              <a:t>一、認識 SmartGateway</a:t>
             </a:r>
             <a:endParaRPr sz="1700" b="1" dirty="0">
               <a:solidFill>
@@ -11231,27 +11451,8 @@
                 <a:ea typeface="微軟正黑體"/>
                 <a:cs typeface="微軟正黑體"/>
               </a:rPr>
-              <a:t>      –  </a:t>
-            </a:r>
-            <a:r>
-              <a:rPr sz="1300" dirty="0" err="1">
-                <a:solidFill>
-                  <a:srgbClr val="333333"/>
-                </a:solidFill>
-                <a:latin typeface="微軟正黑體"/>
-                <a:ea typeface="微軟正黑體"/>
-                <a:cs typeface="微軟正黑體"/>
-              </a:rPr>
-              <a:t>這台裝置能做什麼</a:t>
-            </a:r>
-            <a:endParaRPr sz="1300" dirty="0">
-              <a:solidFill>
-                <a:srgbClr val="333333"/>
-              </a:solidFill>
-              <a:latin typeface="微軟正黑體"/>
-              <a:ea typeface="微軟正黑體"/>
-              <a:cs typeface="微軟正黑體"/>
-            </a:endParaRPr>
+              <a:t>      –  這台 SmartGateway 能做什麼</a:t>
+            </a:r>
           </a:p>
           <a:p>
             <a:pPr>
@@ -11268,27 +11469,8 @@
                 <a:ea typeface="微軟正黑體"/>
                 <a:cs typeface="微軟正黑體"/>
               </a:rPr>
-              <a:t>      –  </a:t>
-            </a:r>
-            <a:r>
-              <a:rPr sz="1300" dirty="0" err="1">
-                <a:solidFill>
-                  <a:srgbClr val="333333"/>
-                </a:solidFill>
-                <a:latin typeface="微軟正黑體"/>
-                <a:ea typeface="微軟正黑體"/>
-                <a:cs typeface="微軟正黑體"/>
-              </a:rPr>
-              <a:t>支援的量測裝置</a:t>
-            </a:r>
-            <a:endParaRPr sz="1300" dirty="0">
-              <a:solidFill>
-                <a:srgbClr val="333333"/>
-              </a:solidFill>
-              <a:latin typeface="微軟正黑體"/>
-              <a:ea typeface="微軟正黑體"/>
-              <a:cs typeface="微軟正黑體"/>
-            </a:endParaRPr>
+              <a:t>      –  支援的量測醫材</a:t>
+            </a:r>
           </a:p>
           <a:p>
             <a:pPr>
@@ -11305,27 +11487,8 @@
                 <a:ea typeface="微軟正黑體"/>
                 <a:cs typeface="微軟正黑體"/>
               </a:rPr>
-              <a:t>      –  </a:t>
-            </a:r>
-            <a:r>
-              <a:rPr sz="1300" dirty="0" err="1">
-                <a:solidFill>
-                  <a:srgbClr val="333333"/>
-                </a:solidFill>
-                <a:latin typeface="微軟正黑體"/>
-                <a:ea typeface="微軟正黑體"/>
-                <a:cs typeface="微軟正黑體"/>
-              </a:rPr>
-              <a:t>裝置外觀</a:t>
-            </a:r>
-            <a:endParaRPr sz="1300" dirty="0">
-              <a:solidFill>
-                <a:srgbClr val="333333"/>
-              </a:solidFill>
-              <a:latin typeface="微軟正黑體"/>
-              <a:ea typeface="微軟正黑體"/>
-              <a:cs typeface="微軟正黑體"/>
-            </a:endParaRPr>
+              <a:t>      –  SmartGateway 外觀</a:t>
+            </a:r>
           </a:p>
           <a:p>
             <a:pPr>
@@ -11394,7 +11557,7 @@
                 <a:ea typeface="微軟正黑體"/>
                 <a:cs typeface="微軟正黑體"/>
               </a:rPr>
-              <a:t>二、設定裝置</a:t>
+              <a:t>二、設定 SmartGateway</a:t>
             </a:r>
             <a:endParaRPr sz="1700" b="1" dirty="0">
               <a:solidFill>
@@ -12295,7 +12458,7 @@
           <a:p>
             <a:pPr algn="ctr"/>
             <a:r>
-              <a:rPr sz="1250" b="1">
+              <a:rPr sz="1250" b="1" dirty="0" err="1">
                 <a:solidFill>
                   <a:srgbClr val="333333"/>
                 </a:solidFill>
@@ -12305,6 +12468,14 @@
               </a:rPr>
               <a:t>開啟同步視窗</a:t>
             </a:r>
+            <a:endParaRPr sz="1250" b="1" dirty="0">
+              <a:solidFill>
+                <a:srgbClr val="333333"/>
+              </a:solidFill>
+              <a:latin typeface="微軟正黑體"/>
+              <a:ea typeface="微軟正黑體"/>
+              <a:cs typeface="微軟正黑體"/>
+            </a:endParaRPr>
           </a:p>
           <a:p>
             <a:pPr>
@@ -12313,7 +12484,7 @@
               </a:spcBef>
             </a:pPr>
             <a:r>
-              <a:rPr sz="1050" b="0">
+              <a:rPr sz="1050" b="0" dirty="0" err="1">
                 <a:solidFill>
                   <a:srgbClr val="757575"/>
                 </a:solidFill>
@@ -12321,8 +12492,42 @@
                 <a:ea typeface="微軟正黑體"/>
                 <a:cs typeface="微軟正黑體"/>
               </a:rPr>
-              <a:t>在中繼器上短按中鍵，開啟 30 秒搜尋視窗——這台裝置不會自動連線，一定要主動按中鍵</a:t>
-            </a:r>
+              <a:t>在 SmartGateway 上短按中鍵，開啟 30 秒搜尋視窗</a:t>
+            </a:r>
+            <a:endParaRPr lang="en-US" sz="1050" dirty="0">
+              <a:solidFill>
+                <a:srgbClr val="757575"/>
+              </a:solidFill>
+              <a:latin typeface="微軟正黑體"/>
+              <a:ea typeface="微軟正黑體"/>
+              <a:cs typeface="微軟正黑體"/>
+            </a:endParaRPr>
+          </a:p>
+          <a:p>
+            <a:pPr>
+              <a:spcBef>
+                <a:spcPts val="300"/>
+              </a:spcBef>
+            </a:pPr>
+            <a:r>
+              <a:rPr sz="1050" b="0" dirty="0" err="1">
+                <a:solidFill>
+                  <a:srgbClr val="FF0000"/>
+                </a:solidFill>
+                <a:latin typeface="微軟正黑體"/>
+                <a:ea typeface="微軟正黑體"/>
+                <a:cs typeface="微軟正黑體"/>
+              </a:rPr>
+              <a:t>這台醫材不會自動連線，一定要主動短按中鍵</a:t>
+            </a:r>
+            <a:endParaRPr sz="1050" b="0" dirty="0">
+              <a:solidFill>
+                <a:srgbClr val="FF0000"/>
+              </a:solidFill>
+              <a:latin typeface="微軟正黑體"/>
+              <a:ea typeface="微軟正黑體"/>
+              <a:cs typeface="微軟正黑體"/>
+            </a:endParaRPr>
           </a:p>
         </p:txBody>
       </p:sp>
@@ -12555,7 +12760,7 @@
           <a:p>
             <a:pPr algn="ctr"/>
             <a:r>
-              <a:rPr sz="1250" b="1">
+              <a:rPr sz="1250" b="1" dirty="0" err="1">
                 <a:solidFill>
                   <a:srgbClr val="333333"/>
                 </a:solidFill>
@@ -12563,8 +12768,16 @@
                 <a:ea typeface="微軟正黑體"/>
                 <a:cs typeface="微軟正黑體"/>
               </a:rPr>
-              <a:t>中繼器自動抓取</a:t>
-            </a:r>
+              <a:t>SmartGateway 自動抓取</a:t>
+            </a:r>
+            <a:endParaRPr sz="1250" b="1" dirty="0">
+              <a:solidFill>
+                <a:srgbClr val="333333"/>
+              </a:solidFill>
+              <a:latin typeface="微軟正黑體"/>
+              <a:ea typeface="微軟正黑體"/>
+              <a:cs typeface="微軟正黑體"/>
+            </a:endParaRPr>
           </a:p>
           <a:p>
             <a:pPr>
@@ -12573,7 +12786,7 @@
               </a:spcBef>
             </a:pPr>
             <a:r>
-              <a:rPr sz="1050" b="0">
+              <a:rPr sz="1050" b="0" dirty="0">
                 <a:solidFill>
                   <a:srgbClr val="757575"/>
                 </a:solidFill>
@@ -12581,7 +12794,7 @@
                 <a:ea typeface="微軟正黑體"/>
                 <a:cs typeface="微軟正黑體"/>
               </a:rPr>
-              <a:t>30 秒視窗內掃到裝置就會自動連線收下血糖值，紀錄的時間是實際量測當下，不是連線當下</a:t>
+              <a:t>30 秒視窗內掃到醫材就會自動連線收下血糖值，紀錄的時間是實際量測當下，不是連線當下</a:t>
             </a:r>
           </a:p>
         </p:txBody>
@@ -12771,6 +12984,184 @@
           </a:p>
         </p:txBody>
       </p:sp>
+      <p:sp>
+        <p:nvSpPr>
+          <p:cNvPr id="16" name="星形: 四角 15">
+            <a:extLst>
+              <a:ext uri="{FF2B5EF4-FFF2-40B4-BE49-F238E27FC236}">
+                <a16:creationId xmlns:a16="http://schemas.microsoft.com/office/drawing/2014/main" id="{EDB308C7-B6E6-49D4-EA35-C99C0400776C}"/>
+              </a:ext>
+            </a:extLst>
+          </p:cNvPr>
+          <p:cNvSpPr/>
+          <p:nvPr/>
+        </p:nvSpPr>
+        <p:spPr bwMode="auto">
+          <a:xfrm>
+            <a:off x="4077659" y="2716543"/>
+            <a:ext cx="295794" cy="295794"/>
+          </a:xfrm>
+          <a:prstGeom prst="star4">
+            <a:avLst/>
+          </a:prstGeom>
+          <a:solidFill>
+            <a:srgbClr val="FF0000"/>
+          </a:solidFill>
+          <a:ln w="9525" cap="flat" cmpd="sng" algn="ctr">
+            <a:noFill/>
+            <a:prstDash val="solid"/>
+            <a:round/>
+            <a:headEnd type="none" w="med" len="med"/>
+            <a:tailEnd type="none" w="med" len="med"/>
+          </a:ln>
+          <a:effectLst/>
+        </p:spPr>
+        <p:txBody>
+          <a:bodyPr vert="horz" wrap="square" lIns="91440" tIns="45720" rIns="91440" bIns="45720" numCol="1" rtlCol="0" anchor="t" anchorCtr="0" compatLnSpc="1">
+            <a:prstTxWarp prst="textNoShape">
+              <a:avLst/>
+            </a:prstTxWarp>
+          </a:bodyPr>
+          <a:lstStyle/>
+          <a:p>
+            <a:pPr marL="0" marR="0" indent="0" algn="ctr" defTabSz="914400" rtl="0" eaLnBrk="1" fontAlgn="base" latinLnBrk="0" hangingPunct="1">
+              <a:lnSpc>
+                <a:spcPct val="100000"/>
+              </a:lnSpc>
+              <a:spcBef>
+                <a:spcPct val="0"/>
+              </a:spcBef>
+              <a:spcAft>
+                <a:spcPct val="0"/>
+              </a:spcAft>
+              <a:buClrTx/>
+              <a:buSzTx/>
+              <a:buFontTx/>
+              <a:buNone/>
+              <a:tabLst/>
+            </a:pPr>
+            <a:endParaRPr kumimoji="1" lang="zh-TW" altLang="en-US" sz="1800" b="0" i="0" u="none" strike="noStrike" cap="none" normalizeH="0" baseline="0">
+              <a:ln>
+                <a:noFill/>
+              </a:ln>
+              <a:solidFill>
+                <a:schemeClr val="tx1"/>
+              </a:solidFill>
+              <a:effectLst/>
+              <a:latin typeface="Arial" charset="0"/>
+              <a:ea typeface="新細明體" pitchFamily="18" charset="-120"/>
+            </a:endParaRPr>
+          </a:p>
+        </p:txBody>
+      </p:sp>
+      <p:sp>
+        <p:nvSpPr>
+          <p:cNvPr id="17" name="TextBox 3">
+            <a:extLst>
+              <a:ext uri="{FF2B5EF4-FFF2-40B4-BE49-F238E27FC236}">
+                <a16:creationId xmlns:a16="http://schemas.microsoft.com/office/drawing/2014/main" id="{2447E3E8-465C-1D7D-A0E3-6E7DF97CA772}"/>
+              </a:ext>
+            </a:extLst>
+          </p:cNvPr>
+          <p:cNvSpPr txBox="1"/>
+          <p:nvPr/>
+        </p:nvSpPr>
+        <p:spPr>
+          <a:xfrm>
+            <a:off x="698740" y="5149165"/>
+            <a:ext cx="2656936" cy="292388"/>
+          </a:xfrm>
+          <a:prstGeom prst="rect">
+            <a:avLst/>
+          </a:prstGeom>
+          <a:noFill/>
+        </p:spPr>
+        <p:txBody>
+          <a:bodyPr wrap="square">
+            <a:spAutoFit/>
+          </a:bodyPr>
+          <a:lstStyle/>
+          <a:p>
+            <a:pPr algn="ctr"/>
+            <a:r>
+              <a:rPr sz="1300" b="1">
+                <a:solidFill>
+                  <a:srgbClr val="134349"/>
+                </a:solidFill>
+                <a:latin typeface="微軟正黑體"/>
+                <a:ea typeface="微軟正黑體"/>
+                <a:cs typeface="微軟正黑體"/>
+              </a:rPr>
+              <a:t>頂面：三顆按鍵</a:t>
+            </a:r>
+          </a:p>
+        </p:txBody>
+      </p:sp>
+      <p:pic>
+        <p:nvPicPr>
+          <p:cNvPr id="18" name="Picture 4" descr="device_face_top.png">
+            <a:extLst>
+              <a:ext uri="{FF2B5EF4-FFF2-40B4-BE49-F238E27FC236}">
+                <a16:creationId xmlns:a16="http://schemas.microsoft.com/office/drawing/2014/main" id="{EE34856F-BCC8-4F2D-A357-8ACAB9AEF485}"/>
+              </a:ext>
+            </a:extLst>
+          </p:cNvPr>
+          <p:cNvPicPr>
+            <a:picLocks noChangeAspect="1"/>
+          </p:cNvPicPr>
+          <p:nvPr/>
+        </p:nvPicPr>
+        <p:blipFill>
+          <a:blip r:embed="rId3"/>
+          <a:stretch>
+            <a:fillRect/>
+          </a:stretch>
+        </p:blipFill>
+        <p:spPr>
+          <a:xfrm>
+            <a:off x="698740" y="5500974"/>
+            <a:ext cx="2656936" cy="796315"/>
+          </a:xfrm>
+          <a:prstGeom prst="rect">
+            <a:avLst/>
+          </a:prstGeom>
+        </p:spPr>
+      </p:pic>
+      <p:cxnSp>
+        <p:nvCxnSpPr>
+          <p:cNvPr id="20" name="直線單箭頭接點 19">
+            <a:extLst>
+              <a:ext uri="{FF2B5EF4-FFF2-40B4-BE49-F238E27FC236}">
+                <a16:creationId xmlns:a16="http://schemas.microsoft.com/office/drawing/2014/main" id="{942B83E3-718A-59E0-A401-70A2B2D41C8E}"/>
+              </a:ext>
+            </a:extLst>
+          </p:cNvPr>
+          <p:cNvCxnSpPr/>
+          <p:nvPr/>
+        </p:nvCxnSpPr>
+        <p:spPr bwMode="auto">
+          <a:xfrm flipH="1">
+            <a:off x="2199736" y="3012337"/>
+            <a:ext cx="1986464" cy="2732855"/>
+          </a:xfrm>
+          <a:prstGeom prst="straightConnector1">
+            <a:avLst/>
+          </a:prstGeom>
+          <a:solidFill>
+            <a:schemeClr val="accent1"/>
+          </a:solidFill>
+          <a:ln w="38100" cap="flat" cmpd="sng" algn="ctr">
+            <a:solidFill>
+              <a:srgbClr val="FF0000"/>
+            </a:solidFill>
+            <a:prstDash val="solid"/>
+            <a:round/>
+            <a:headEnd type="none" w="med" len="med"/>
+            <a:tailEnd type="triangle"/>
+          </a:ln>
+          <a:effectLst/>
+        </p:spPr>
+      </p:cxnSp>
     </p:spTree>
   </p:cSld>
   <p:clrMapOvr>
@@ -13071,27 +13462,8 @@
                 <a:ea typeface="微軟正黑體"/>
                 <a:cs typeface="微軟正黑體"/>
               </a:rPr>
-              <a:t>•  </a:t>
-            </a:r>
-            <a:r>
-              <a:rPr sz="1400" b="1" dirty="0" err="1">
-                <a:solidFill>
-                  <a:srgbClr val="333333"/>
-                </a:solidFill>
-                <a:latin typeface="微軟正黑體"/>
-                <a:ea typeface="微軟正黑體"/>
-                <a:cs typeface="微軟正黑體"/>
-              </a:rPr>
-              <a:t>裝置每次連線都會經過這三種狀態</a:t>
-            </a:r>
-            <a:endParaRPr sz="1400" b="1" dirty="0">
-              <a:solidFill>
-                <a:srgbClr val="333333"/>
-              </a:solidFill>
-              <a:latin typeface="微軟正黑體"/>
-              <a:ea typeface="微軟正黑體"/>
-              <a:cs typeface="微軟正黑體"/>
-            </a:endParaRPr>
+              <a:t>•  SmartGateway 每次連線都會經過這三種狀態</a:t>
+            </a:r>
           </a:p>
           <a:p>
             <a:pPr>
@@ -13641,6 +14013,63 @@
                 <a:ea typeface="微軟正黑體"/>
                 <a:cs typeface="微軟正黑體"/>
               </a:rPr>
+              <a:t>•  資料先存 SmartGateway，不會遺失</a:t>
+            </a:r>
+          </a:p>
+          <a:p>
+            <a:pPr>
+              <a:spcAft>
+                <a:spcPts val="1600"/>
+              </a:spcAft>
+              <a:buNone/>
+            </a:pPr>
+            <a:r>
+              <a:rPr sz="1450" b="0" dirty="0">
+                <a:solidFill>
+                  <a:srgbClr val="757575"/>
+                </a:solidFill>
+                <a:latin typeface="微軟正黑體"/>
+                <a:ea typeface="微軟正黑體"/>
+                <a:cs typeface="微軟正黑體"/>
+              </a:rPr>
+              <a:t>     </a:t>
+            </a:r>
+            <a:r>
+              <a:rPr sz="1450" b="0" dirty="0" err="1">
+                <a:solidFill>
+                  <a:srgbClr val="757575"/>
+                </a:solidFill>
+                <a:latin typeface="微軟正黑體"/>
+                <a:ea typeface="微軟正黑體"/>
+                <a:cs typeface="微軟正黑體"/>
+              </a:rPr>
+              <a:t>斷電也不影響，恢復供電後自動補傳</a:t>
+            </a:r>
+            <a:endParaRPr sz="1450" b="0" dirty="0">
+              <a:solidFill>
+                <a:srgbClr val="757575"/>
+              </a:solidFill>
+              <a:latin typeface="微軟正黑體"/>
+              <a:ea typeface="微軟正黑體"/>
+              <a:cs typeface="微軟正黑體"/>
+            </a:endParaRPr>
+          </a:p>
+          <a:p>
+            <a:pPr>
+              <a:spcAft>
+                <a:spcPts val="400"/>
+              </a:spcAft>
+              <a:buNone/>
+            </a:pPr>
+            <a:r>
+              <a:rPr sz="1900" b="1" dirty="0">
+                <a:solidFill>
+                  <a:srgbClr val="333333"/>
+                </a:solidFill>
+                <a:latin typeface="微軟正黑體"/>
+                <a:ea typeface="微軟正黑體"/>
+                <a:cs typeface="微軟正黑體"/>
+              </a:rPr>
               <a:t>•  </a:t>
             </a:r>
             <a:r>
@@ -13652,7 +14081,7 @@
                 <a:ea typeface="微軟正黑體"/>
                 <a:cs typeface="微軟正黑體"/>
               </a:rPr>
-              <a:t>資料先存裝置，不會遺失</a:t>
+              <a:t>上傳失敗自動重試</a:t>
             </a:r>
             <a:endParaRPr sz="1900" b="1" dirty="0">
               <a:solidFill>
@@ -13690,7 +14119,7 @@
                 <a:ea typeface="微軟正黑體"/>
                 <a:cs typeface="微軟正黑體"/>
               </a:rPr>
-              <a:t>斷電也不影響，恢復供電後自動補傳</a:t>
+              <a:t>不需要人工處理</a:t>
             </a:r>
             <a:endParaRPr sz="1450" b="0" dirty="0">
               <a:solidFill>
@@ -13728,7 +14157,7 @@
                 <a:ea typeface="微軟正黑體"/>
                 <a:cs typeface="微軟正黑體"/>
               </a:rPr>
-              <a:t>上傳失敗自動重試</a:t>
+              <a:t>右鍵查看待上傳紀錄</a:t>
             </a:r>
             <a:endParaRPr sz="1900" b="1" dirty="0">
               <a:solidFill>
@@ -13766,7 +14195,7 @@
                 <a:ea typeface="微軟正黑體"/>
                 <a:cs typeface="微軟正黑體"/>
               </a:rPr>
-              <a:t>不需要人工處理</a:t>
+              <a:t>排隊中／上次失敗待重試的都看得到</a:t>
             </a:r>
             <a:endParaRPr sz="1450" b="0" dirty="0">
               <a:solidFill>
@@ -13804,16 +14233,41 @@
                 <a:ea typeface="微軟正黑體"/>
                 <a:cs typeface="微軟正黑體"/>
               </a:rPr>
-              <a:t>右鍵查看待上傳紀錄</a:t>
-            </a:r>
-            <a:endParaRPr sz="1900" b="1" dirty="0">
-              <a:solidFill>
-                <a:srgbClr val="333333"/>
-              </a:solidFill>
-              <a:latin typeface="微軟正黑體"/>
-              <a:ea typeface="微軟正黑體"/>
-              <a:cs typeface="微軟正黑體"/>
-            </a:endParaRPr>
+              <a:t>待傳佇列上限</a:t>
+            </a:r>
+            <a:r>
+              <a:rPr sz="1900" b="1" dirty="0">
+                <a:solidFill>
+                  <a:srgbClr val="333333"/>
+                </a:solidFill>
+                <a:latin typeface="微軟正黑體"/>
+                <a:ea typeface="微軟正黑體"/>
+                <a:cs typeface="微軟正黑體"/>
+              </a:rPr>
+              <a:t> </a:t>
+            </a:r>
+            <a:r>
+              <a:rPr lang="en-US" altLang="zh-TW" sz="1900" b="1" dirty="0">
+                <a:solidFill>
+                  <a:srgbClr val="333333"/>
+                </a:solidFill>
+                <a:latin typeface="微軟正黑體"/>
+                <a:ea typeface="微軟正黑體"/>
+                <a:cs typeface="微軟正黑體"/>
+              </a:rPr>
+              <a:t>640</a:t>
+            </a:r>
+            <a:r>
+              <a:rPr sz="1900" b="1" dirty="0">
+                <a:solidFill>
+                  <a:srgbClr val="333333"/>
+                </a:solidFill>
+                <a:latin typeface="微軟正黑體"/>
+                <a:ea typeface="微軟正黑體"/>
+                <a:cs typeface="微軟正黑體"/>
+              </a:rPr>
+              <a:t> 筆</a:t>
+            </a:r>
           </a:p>
           <a:p>
             <a:pPr>
@@ -13842,16 +14296,19 @@
                 <a:ea typeface="微軟正黑體"/>
                 <a:cs typeface="微軟正黑體"/>
               </a:rPr>
-              <a:t>排隊中／上次失敗待重試的都看得到</a:t>
-            </a:r>
-            <a:endParaRPr sz="1450" b="0" dirty="0">
-              <a:solidFill>
-                <a:srgbClr val="757575"/>
-              </a:solidFill>
-              <a:latin typeface="微軟正黑體"/>
-              <a:ea typeface="微軟正黑體"/>
-              <a:cs typeface="微軟正黑體"/>
-            </a:endParaRPr>
+              <a:t>長時間斷網若累積超過上限，新讀值會被捨棄（不是取代最舊的</a:t>
+            </a:r>
+            <a:r>
+              <a:rPr sz="1450" b="0" dirty="0">
+                <a:solidFill>
+                  <a:srgbClr val="757575"/>
+                </a:solidFill>
+                <a:latin typeface="微軟正黑體"/>
+                <a:ea typeface="微軟正黑體"/>
+                <a:cs typeface="微軟正黑體"/>
+              </a:rPr>
+              <a:t>）</a:t>
+            </a:r>
           </a:p>
           <a:p>
             <a:pPr>
@@ -13863,57 +14320,13 @@
             <a:r>
               <a:rPr sz="1900" b="1" dirty="0">
                 <a:solidFill>
-                  <a:srgbClr val="333333"/>
-                </a:solidFill>
-                <a:latin typeface="微軟正黑體"/>
-                <a:ea typeface="微軟正黑體"/>
-                <a:cs typeface="微軟正黑體"/>
-              </a:rPr>
-              <a:t>•  </a:t>
-            </a:r>
-            <a:r>
-              <a:rPr sz="1900" b="1" dirty="0" err="1">
-                <a:solidFill>
-                  <a:srgbClr val="333333"/>
-                </a:solidFill>
-                <a:latin typeface="微軟正黑體"/>
-                <a:ea typeface="微軟正黑體"/>
-                <a:cs typeface="微軟正黑體"/>
-              </a:rPr>
-              <a:t>待傳佇列上限</a:t>
-            </a:r>
-            <a:r>
-              <a:rPr sz="1900" b="1" dirty="0">
-                <a:solidFill>
-                  <a:srgbClr val="333333"/>
-                </a:solidFill>
-                <a:latin typeface="微軟正黑體"/>
-                <a:ea typeface="微軟正黑體"/>
-                <a:cs typeface="微軟正黑體"/>
-              </a:rPr>
-              <a:t> </a:t>
-            </a:r>
-            <a:r>
-              <a:rPr lang="en-US" altLang="zh-TW" sz="1900" b="1" dirty="0">
-                <a:solidFill>
-                  <a:srgbClr val="333333"/>
-                </a:solidFill>
-                <a:latin typeface="微軟正黑體"/>
-                <a:ea typeface="微軟正黑體"/>
-                <a:cs typeface="微軟正黑體"/>
-              </a:rPr>
-              <a:t>640</a:t>
-            </a:r>
-            <a:r>
-              <a:rPr sz="1900" b="1" dirty="0">
-                <a:solidFill>
-                  <a:srgbClr val="333333"/>
-                </a:solidFill>
-                <a:latin typeface="微軟正黑體"/>
-                <a:ea typeface="微軟正黑體"/>
-                <a:cs typeface="微軟正黑體"/>
-              </a:rPr>
-              <a:t> 筆</a:t>
+                  <a:srgbClr val="B85C5C"/>
+                </a:solidFill>
+                <a:latin typeface="微軟正黑體"/>
+                <a:ea typeface="微軟正黑體"/>
+                <a:cs typeface="微軟正黑體"/>
+              </a:rPr>
+              <a:t>•  重新通電時按住右鍵可以清空重來</a:t>
             </a:r>
           </a:p>
           <a:p>
@@ -13932,29 +14345,7 @@
                 <a:ea typeface="微軟正黑體"/>
                 <a:cs typeface="微軟正黑體"/>
               </a:rPr>
-              <a:t>     </a:t>
-            </a:r>
-            <a:r>
-              <a:rPr sz="1450" b="0" dirty="0" err="1">
-                <a:solidFill>
-                  <a:srgbClr val="757575"/>
-                </a:solidFill>
-                <a:latin typeface="微軟正黑體"/>
-                <a:ea typeface="微軟正黑體"/>
-                <a:cs typeface="微軟正黑體"/>
-              </a:rPr>
-              <a:t>長時間斷網若累積超過上限，新讀值會被捨棄（不是取代最舊的</a:t>
-            </a:r>
-            <a:r>
-              <a:rPr sz="1450" b="0" dirty="0">
-                <a:solidFill>
-                  <a:srgbClr val="757575"/>
-                </a:solidFill>
-                <a:latin typeface="微軟正黑體"/>
-                <a:ea typeface="微軟正黑體"/>
-                <a:cs typeface="微軟正黑體"/>
-              </a:rPr>
-              <a:t>）</a:t>
+              <a:t>     這是唯一會清除資料的操作，其他情況都不會遺失；會連 Wi-Fi、個案編號等設定一起清空，跟全新裝置一樣</a:t>
             </a:r>
           </a:p>
         </p:txBody>
@@ -13975,13 +14366,18 @@
           <a:lstStyle/>
           <a:p>
             <a:r>
-              <a:rPr>
+              <a:rPr dirty="0" err="1">
                 <a:latin typeface="微軟正黑體"/>
                 <a:ea typeface="微軟正黑體"/>
                 <a:cs typeface="微軟正黑體"/>
               </a:rPr>
               <a:t>資料安全性</a:t>
             </a:r>
+            <a:endParaRPr dirty="0">
+              <a:latin typeface="微軟正黑體"/>
+              <a:ea typeface="微軟正黑體"/>
+              <a:cs typeface="微軟正黑體"/>
+            </a:endParaRPr>
           </a:p>
         </p:txBody>
       </p:sp>
@@ -14042,11 +14438,17 @@
           <p:cNvGraphicFramePr>
             <a:graphicFrameLocks noGrp="1"/>
           </p:cNvGraphicFramePr>
-          <p:nvPr/>
+          <p:nvPr>
+            <p:extLst>
+              <p:ext uri="{D42A27DB-BD31-4B8C-83A1-F6EECF244321}">
+                <p14:modId xmlns:p14="http://schemas.microsoft.com/office/powerpoint/2010/main" val="3580272793"/>
+              </p:ext>
+            </p:extLst>
+          </p:nvPr>
         </p:nvGraphicFramePr>
         <p:xfrm>
           <a:off x="457200" y="1234440"/>
-          <a:ext cx="8229600" cy="2743200"/>
+          <a:ext cx="8229600" cy="3017520"/>
         </p:xfrm>
         <a:graphic>
           <a:graphicData uri="http://schemas.openxmlformats.org/drawingml/2006/table">
@@ -14168,7 +14570,7 @@
                           <a:ea typeface="微軟正黑體"/>
                           <a:cs typeface="微軟正黑體"/>
                         </a:rPr>
-                        <a:t>確認量測裝置藍牙開啟、電池足夠。同一台裝置量測後需要等一段時間（額溫槍約1分鐘、血壓計約3分鐘）才會再連線；血糖機 GM700SB 不會自動連線，每次都要在中繼器上短按中鍵開啟 30 秒搜尋視窗</a:t>
+                        <a:t>確認醫材藍牙開啟、電池足夠。同一台醫材量測後需要等一段時間（額溫槍約1分鐘、血壓計約3分鐘）才會再連線；血糖機 GM700SB 不會自動連線，每次都要在 SmartGateway 上短按中鍵開啟 30 秒搜尋視窗</a:t>
                       </a:r>
                     </a:p>
                   </a:txBody>
@@ -14420,6 +14822,39 @@
                         </a:rPr>
                         <a:t>分鐘後自動跳過</a:t>
                       </a:r>
+                      <a:r>
+                        <a:rPr lang="zh-TW" altLang="en-US" sz="1100" b="0" dirty="0">
+                          <a:solidFill>
+                            <a:srgbClr val="333333"/>
+                          </a:solidFill>
+                          <a:latin typeface="微軟正黑體"/>
+                          <a:ea typeface="+mn-ea"/>
+                          <a:cs typeface="微軟正黑體"/>
+                        </a:rPr>
+                        <a:t>。短按左鍵也能用來跳過開機的 </a:t>
+                      </a:r>
+                      <a:r>
+                        <a:rPr lang="en-US" altLang="zh-TW" sz="1100" b="0" dirty="0">
+                          <a:solidFill>
+                            <a:srgbClr val="333333"/>
+                          </a:solidFill>
+                          <a:latin typeface="微軟正黑體"/>
+                          <a:ea typeface="+mn-ea"/>
+                          <a:cs typeface="微軟正黑體"/>
+                        </a:rPr>
+                        <a:t>3 </a:t>
+                      </a:r>
+                      <a:r>
+                        <a:rPr lang="zh-TW" altLang="en-US" sz="1100" b="0" dirty="0">
+                          <a:solidFill>
+                            <a:srgbClr val="333333"/>
+                          </a:solidFill>
+                          <a:latin typeface="微軟正黑體"/>
+                          <a:ea typeface="+mn-ea"/>
+                          <a:cs typeface="微軟正黑體"/>
+                        </a:rPr>
+                        <a:t>分鐘等待</a:t>
+                      </a:r>
                       <a:endParaRPr sz="1100" b="0" dirty="0">
                         <a:solidFill>
                           <a:srgbClr val="333333"/>
@@ -14676,7 +15111,7 @@
                 <a:ea typeface="微軟正黑體"/>
                 <a:cs typeface="微軟正黑體"/>
               </a:rPr>
-              <a:t>一　認識裝置</a:t>
+              <a:t>一　認識 SmartGateway</a:t>
             </a:r>
           </a:p>
         </p:txBody>
@@ -14705,7 +15140,7 @@
                 <a:ea typeface="微軟正黑體"/>
                 <a:cs typeface="微軟正黑體"/>
               </a:rPr>
-              <a:t>裝置長怎樣、按鍵跟螢幕代表什麼</a:t>
+              <a:t>SmartGateway 長怎樣、按鍵跟螢幕代表什麼</a:t>
             </a:r>
           </a:p>
         </p:txBody>
@@ -14822,7 +15257,7 @@
                 <a:ea typeface="微軟正黑體"/>
                 <a:cs typeface="微軟正黑體"/>
               </a:rPr>
-              <a:t>     沒上傳成功的資料會先存在裝置裡，恢復供電後自動補傳</a:t>
+              <a:t>     沒上傳成功的資料會先存在 SmartGateway 裡，恢復供電後自動補傳</a:t>
             </a:r>
           </a:p>
           <a:p>
@@ -14886,7 +15321,7 @@
                 <a:ea typeface="微軟正黑體"/>
                 <a:cs typeface="微軟正黑體"/>
               </a:rPr>
-              <a:t>這台裝置能做什麼</a:t>
+              <a:t>這台 SmartGateway 能做什麼</a:t>
             </a:r>
           </a:p>
         </p:txBody>
@@ -14937,7 +15372,7 @@
                 <a:ea typeface="微軟正黑體"/>
                 <a:cs typeface="微軟正黑體"/>
               </a:rPr>
-              <a:t>支援的量測裝置</a:t>
+              <a:t>支援的量測醫材</a:t>
             </a:r>
           </a:p>
         </p:txBody>
@@ -15792,7 +16227,7 @@
                 <a:ea typeface="微軟正黑體"/>
                 <a:cs typeface="微軟正黑體"/>
               </a:rPr>
-              <a:t>裝置外觀</a:t>
+              <a:t>SmartGateway 外觀</a:t>
             </a:r>
           </a:p>
         </p:txBody>
@@ -16032,8 +16467,8 @@
         </p:nvSpPr>
         <p:spPr>
           <a:xfrm>
-            <a:off x="4803355" y="2495248"/>
-            <a:ext cx="1069738" cy="1673168"/>
+            <a:off x="4803354" y="2495247"/>
+            <a:ext cx="1280945" cy="1943297"/>
           </a:xfrm>
           <a:prstGeom prst="roundRect">
             <a:avLst>
@@ -16087,7 +16522,7 @@
         </p:nvSpPr>
         <p:spPr>
           <a:xfrm>
-            <a:off x="5138266" y="2012764"/>
+            <a:off x="5194881" y="2013547"/>
             <a:ext cx="446279" cy="418292"/>
           </a:xfrm>
           <a:prstGeom prst="ellipse">
@@ -16121,7 +16556,7 @@
           <a:p>
             <a:pPr algn="ctr"/>
             <a:r>
-              <a:rPr sz="1800" b="1">
+              <a:rPr sz="1800" b="1" dirty="0">
                 <a:solidFill>
                   <a:srgbClr val="FFFFFF"/>
                 </a:solidFill>
@@ -16149,7 +16584,7 @@
         <p:spPr>
           <a:xfrm>
             <a:off x="4860306" y="2771490"/>
-            <a:ext cx="976717" cy="292388"/>
+            <a:ext cx="1169558" cy="292388"/>
           </a:xfrm>
           <a:prstGeom prst="rect">
             <a:avLst/>
@@ -16191,8 +16626,8 @@
         </p:nvSpPr>
         <p:spPr>
           <a:xfrm>
-            <a:off x="4860306" y="3396854"/>
-            <a:ext cx="976717" cy="415498"/>
+            <a:off x="4860306" y="3069843"/>
+            <a:ext cx="1169558" cy="253916"/>
           </a:xfrm>
           <a:prstGeom prst="rect">
             <a:avLst/>
@@ -16242,8 +16677,8 @@
         </p:nvSpPr>
         <p:spPr>
           <a:xfrm>
-            <a:off x="6375920" y="2483010"/>
-            <a:ext cx="1069738" cy="1673168"/>
+            <a:off x="6186142" y="2483010"/>
+            <a:ext cx="1280945" cy="1955534"/>
           </a:xfrm>
           <a:prstGeom prst="roundRect">
             <a:avLst>
@@ -16297,7 +16732,7 @@
         </p:nvSpPr>
         <p:spPr>
           <a:xfrm>
-            <a:off x="6710831" y="2000526"/>
+            <a:off x="6611542" y="2000526"/>
             <a:ext cx="446279" cy="418292"/>
           </a:xfrm>
           <a:prstGeom prst="ellipse">
@@ -16331,7 +16766,7 @@
           <a:p>
             <a:pPr algn="ctr"/>
             <a:r>
-              <a:rPr sz="1800" b="1">
+              <a:rPr sz="1800" b="1" dirty="0">
                 <a:solidFill>
                   <a:srgbClr val="FFFFFF"/>
                 </a:solidFill>
@@ -16358,8 +16793,8 @@
         </p:nvSpPr>
         <p:spPr>
           <a:xfrm>
-            <a:off x="6432871" y="2759252"/>
-            <a:ext cx="976717" cy="292388"/>
+            <a:off x="6186143" y="3579592"/>
+            <a:ext cx="1169558" cy="292388"/>
           </a:xfrm>
           <a:prstGeom prst="rect">
             <a:avLst/>
@@ -16374,7 +16809,7 @@
           <a:p>
             <a:pPr algn="ctr"/>
             <a:r>
-              <a:rPr sz="1300" b="1">
+              <a:rPr sz="1300" b="1" dirty="0" err="1">
                 <a:solidFill>
                   <a:srgbClr val="333333"/>
                 </a:solidFill>
@@ -16384,6 +16819,14 @@
               </a:rPr>
               <a:t>短按</a:t>
             </a:r>
+            <a:endParaRPr sz="1300" b="1" dirty="0">
+              <a:solidFill>
+                <a:srgbClr val="333333"/>
+              </a:solidFill>
+              <a:latin typeface="微軟正黑體"/>
+              <a:ea typeface="微軟正黑體"/>
+              <a:cs typeface="微軟正黑體"/>
+            </a:endParaRPr>
           </a:p>
         </p:txBody>
       </p:sp>
@@ -16401,8 +16844,8 @@
         </p:nvSpPr>
         <p:spPr>
           <a:xfrm>
-            <a:off x="6432871" y="3111640"/>
-            <a:ext cx="976717" cy="1000000"/>
+            <a:off x="6186143" y="3931980"/>
+            <a:ext cx="1169558" cy="253916"/>
           </a:xfrm>
           <a:prstGeom prst="rect">
             <a:avLst/>
@@ -16416,7 +16859,7 @@
           <a:lstStyle/>
           <a:p>
             <a:r>
-              <a:rPr sz="1050" b="0">
+              <a:rPr lang="zh-TW" altLang="en-US" sz="1050" b="0" dirty="0">
                 <a:solidFill>
                   <a:srgbClr val="757575"/>
                 </a:solidFill>
@@ -16424,35 +16867,10 @@
                 <a:ea typeface="微軟正黑體"/>
                 <a:cs typeface="微軟正黑體"/>
               </a:rPr>
-              <a:t>GM700SB 同步</a:t>
-            </a:r>
-          </a:p>
-          <a:p>
-            <a:pPr>
-              <a:spcBef>
-                <a:spcPts val="600"/>
-              </a:spcBef>
-            </a:pPr>
-            <a:r>
-              <a:rPr sz="1300" b="1">
-                <a:solidFill>
-                  <a:srgbClr val="333333"/>
-                </a:solidFill>
-                <a:latin typeface="微軟正黑體"/>
-                <a:ea typeface="微軟正黑體"/>
-                <a:cs typeface="微軟正黑體"/>
-              </a:rPr>
-              <a:t>長按 3 秒</a:t>
-            </a:r>
-          </a:p>
-          <a:p>
-            <a:pPr>
-              <a:spcBef>
-                <a:spcPts val="100"/>
-              </a:spcBef>
-            </a:pPr>
-            <a:r>
-              <a:rPr sz="1050" b="0">
+              <a:t>接收</a:t>
+            </a:r>
+            <a:r>
+              <a:rPr sz="1050" b="0" dirty="0">
                 <a:solidFill>
                   <a:srgbClr val="757575"/>
                 </a:solidFill>
@@ -16460,7 +16878,7 @@
                 <a:ea typeface="微軟正黑體"/>
                 <a:cs typeface="微軟正黑體"/>
               </a:rPr>
-              <a:t>手動上傳</a:t>
+              <a:t>GM700SB</a:t>
             </a:r>
           </a:p>
         </p:txBody>
@@ -16479,8 +16897,8 @@
         </p:nvSpPr>
         <p:spPr>
           <a:xfrm>
-            <a:off x="7948485" y="2458328"/>
-            <a:ext cx="1069738" cy="1673168"/>
+            <a:off x="7568930" y="2481611"/>
+            <a:ext cx="1280945" cy="2005537"/>
           </a:xfrm>
           <a:prstGeom prst="roundRect">
             <a:avLst>
@@ -16534,7 +16952,7 @@
         </p:nvSpPr>
         <p:spPr>
           <a:xfrm>
-            <a:off x="8283396" y="1975844"/>
+            <a:off x="8028203" y="2000526"/>
             <a:ext cx="446279" cy="418292"/>
           </a:xfrm>
           <a:prstGeom prst="ellipse">
@@ -16568,7 +16986,7 @@
           <a:p>
             <a:pPr algn="ctr"/>
             <a:r>
-              <a:rPr sz="1800" b="1">
+              <a:rPr sz="1800" b="1" dirty="0">
                 <a:solidFill>
                   <a:srgbClr val="FFFFFF"/>
                 </a:solidFill>
@@ -16595,8 +17013,8 @@
         </p:nvSpPr>
         <p:spPr>
           <a:xfrm>
-            <a:off x="8005436" y="2734570"/>
-            <a:ext cx="976717" cy="292388"/>
+            <a:off x="7616698" y="3606887"/>
+            <a:ext cx="1169558" cy="292388"/>
           </a:xfrm>
           <a:prstGeom prst="rect">
             <a:avLst/>
@@ -16611,7 +17029,7 @@
           <a:p>
             <a:pPr algn="ctr"/>
             <a:r>
-              <a:rPr sz="1300" b="1">
+              <a:rPr lang="zh-TW" altLang="en-US" sz="1300" b="1" dirty="0">
                 <a:solidFill>
                   <a:srgbClr val="333333"/>
                 </a:solidFill>
@@ -16619,7 +17037,7 @@
                 <a:ea typeface="微軟正黑體"/>
                 <a:cs typeface="微軟正黑體"/>
               </a:rPr>
-              <a:t>按一下</a:t>
+              <a:t>短按</a:t>
             </a:r>
           </a:p>
         </p:txBody>
@@ -16638,8 +17056,8 @@
         </p:nvSpPr>
         <p:spPr>
           <a:xfrm>
-            <a:off x="8005436" y="3359934"/>
-            <a:ext cx="976717" cy="415498"/>
+            <a:off x="7616698" y="3936195"/>
+            <a:ext cx="1169558" cy="415498"/>
           </a:xfrm>
           <a:prstGeom prst="rect">
             <a:avLst/>
@@ -16654,7 +17072,7 @@
           <a:p>
             <a:pPr algn="ctr"/>
             <a:r>
-              <a:rPr sz="1050">
+              <a:rPr sz="1050" dirty="0" err="1">
                 <a:solidFill>
                   <a:srgbClr val="757575"/>
                 </a:solidFill>
@@ -16664,6 +17082,14 @@
               </a:rPr>
               <a:t>查看尚未上傳的紀錄</a:t>
             </a:r>
+            <a:endParaRPr sz="1050" dirty="0">
+              <a:solidFill>
+                <a:srgbClr val="757575"/>
+              </a:solidFill>
+              <a:latin typeface="微軟正黑體"/>
+              <a:ea typeface="微軟正黑體"/>
+              <a:cs typeface="微軟正黑體"/>
+            </a:endParaRPr>
           </a:p>
         </p:txBody>
       </p:sp>
@@ -16705,9 +17131,358 @@
                 <a:ea typeface="微軟正黑體"/>
                 <a:cs typeface="微軟正黑體"/>
               </a:rPr>
-              <a:t>平時不用按任何鍵，裝置會自動運作</a:t>
+              <a:t>平時不用按任何鍵，SmartGateway 會自動運作</a:t>
             </a:r>
             <a:endParaRPr sz="1400" b="1" dirty="0">
+              <a:solidFill>
+                <a:srgbClr val="757575"/>
+              </a:solidFill>
+              <a:latin typeface="微軟正黑體"/>
+              <a:ea typeface="微軟正黑體"/>
+              <a:cs typeface="微軟正黑體"/>
+            </a:endParaRPr>
+          </a:p>
+        </p:txBody>
+      </p:sp>
+      <p:sp>
+        <p:nvSpPr>
+          <p:cNvPr id="7" name="TextBox 8">
+            <a:extLst>
+              <a:ext uri="{FF2B5EF4-FFF2-40B4-BE49-F238E27FC236}">
+                <a16:creationId xmlns:a16="http://schemas.microsoft.com/office/drawing/2014/main" id="{360B36B5-39E9-B0B1-2B08-EC7A45188A21}"/>
+              </a:ext>
+            </a:extLst>
+          </p:cNvPr>
+          <p:cNvSpPr txBox="1"/>
+          <p:nvPr/>
+        </p:nvSpPr>
+        <p:spPr>
+          <a:xfrm>
+            <a:off x="6229684" y="2758314"/>
+            <a:ext cx="1169558" cy="292388"/>
+          </a:xfrm>
+          <a:prstGeom prst="rect">
+            <a:avLst/>
+          </a:prstGeom>
+          <a:noFill/>
+        </p:spPr>
+        <p:txBody>
+          <a:bodyPr wrap="square" anchor="t">
+            <a:spAutoFit/>
+          </a:bodyPr>
+          <a:lstStyle/>
+          <a:p>
+            <a:pPr>
+              <a:spcBef>
+                <a:spcPts val="600"/>
+              </a:spcBef>
+            </a:pPr>
+            <a:r>
+              <a:rPr lang="zh-TW" altLang="en-US" sz="1300" b="1" dirty="0">
+                <a:solidFill>
+                  <a:srgbClr val="333333"/>
+                </a:solidFill>
+                <a:latin typeface="微軟正黑體"/>
+                <a:ea typeface="微軟正黑體"/>
+                <a:cs typeface="微軟正黑體"/>
+              </a:rPr>
+              <a:t>長按 </a:t>
+            </a:r>
+            <a:r>
+              <a:rPr lang="en-US" altLang="zh-TW" sz="1300" b="1" dirty="0">
+                <a:solidFill>
+                  <a:srgbClr val="333333"/>
+                </a:solidFill>
+                <a:latin typeface="微軟正黑體"/>
+                <a:ea typeface="微軟正黑體"/>
+                <a:cs typeface="微軟正黑體"/>
+              </a:rPr>
+              <a:t>3 </a:t>
+            </a:r>
+            <a:r>
+              <a:rPr lang="zh-TW" altLang="en-US" sz="1300" b="1" dirty="0">
+                <a:solidFill>
+                  <a:srgbClr val="333333"/>
+                </a:solidFill>
+                <a:latin typeface="微軟正黑體"/>
+                <a:ea typeface="微軟正黑體"/>
+                <a:cs typeface="微軟正黑體"/>
+              </a:rPr>
+              <a:t>秒</a:t>
+            </a:r>
+          </a:p>
+        </p:txBody>
+      </p:sp>
+      <p:sp>
+        <p:nvSpPr>
+          <p:cNvPr id="8" name="TextBox 9">
+            <a:extLst>
+              <a:ext uri="{FF2B5EF4-FFF2-40B4-BE49-F238E27FC236}">
+                <a16:creationId xmlns:a16="http://schemas.microsoft.com/office/drawing/2014/main" id="{4B04A3F6-BAC2-DD5C-8B40-C6993897D4A6}"/>
+              </a:ext>
+            </a:extLst>
+          </p:cNvPr>
+          <p:cNvSpPr txBox="1"/>
+          <p:nvPr/>
+        </p:nvSpPr>
+        <p:spPr>
+          <a:xfrm>
+            <a:off x="6219244" y="3073028"/>
+            <a:ext cx="1169558" cy="415498"/>
+          </a:xfrm>
+          <a:prstGeom prst="rect">
+            <a:avLst/>
+          </a:prstGeom>
+          <a:noFill/>
+        </p:spPr>
+        <p:txBody>
+          <a:bodyPr wrap="square" anchor="t">
+            <a:spAutoFit/>
+          </a:bodyPr>
+          <a:lstStyle/>
+          <a:p>
+            <a:pPr>
+              <a:spcBef>
+                <a:spcPts val="100"/>
+              </a:spcBef>
+            </a:pPr>
+            <a:r>
+              <a:rPr lang="zh-TW" altLang="en-US" sz="1050" b="0" dirty="0">
+                <a:solidFill>
+                  <a:srgbClr val="757575"/>
+                </a:solidFill>
+                <a:latin typeface="微軟正黑體"/>
+                <a:ea typeface="微軟正黑體"/>
+                <a:cs typeface="微軟正黑體"/>
+              </a:rPr>
+              <a:t>未上傳紀錄重新上傳</a:t>
+            </a:r>
+            <a:endParaRPr sz="1050" b="0" dirty="0">
+              <a:solidFill>
+                <a:srgbClr val="757575"/>
+              </a:solidFill>
+              <a:latin typeface="微軟正黑體"/>
+              <a:ea typeface="微軟正黑體"/>
+              <a:cs typeface="微軟正黑體"/>
+            </a:endParaRPr>
+          </a:p>
+        </p:txBody>
+      </p:sp>
+      <p:sp>
+        <p:nvSpPr>
+          <p:cNvPr id="10" name="TextBox 8">
+            <a:extLst>
+              <a:ext uri="{FF2B5EF4-FFF2-40B4-BE49-F238E27FC236}">
+                <a16:creationId xmlns:a16="http://schemas.microsoft.com/office/drawing/2014/main" id="{69C2994A-19AA-7DBC-4859-E66B755701D7}"/>
+              </a:ext>
+            </a:extLst>
+          </p:cNvPr>
+          <p:cNvSpPr txBox="1"/>
+          <p:nvPr/>
+        </p:nvSpPr>
+        <p:spPr>
+          <a:xfrm>
+            <a:off x="4863001" y="3579592"/>
+            <a:ext cx="1169558" cy="292388"/>
+          </a:xfrm>
+          <a:prstGeom prst="rect">
+            <a:avLst/>
+          </a:prstGeom>
+          <a:noFill/>
+        </p:spPr>
+        <p:txBody>
+          <a:bodyPr wrap="square" anchor="t">
+            <a:spAutoFit/>
+          </a:bodyPr>
+          <a:lstStyle/>
+          <a:p>
+            <a:pPr algn="ctr"/>
+            <a:r>
+              <a:rPr sz="1300" b="1" dirty="0" err="1">
+                <a:solidFill>
+                  <a:srgbClr val="333333"/>
+                </a:solidFill>
+                <a:latin typeface="微軟正黑體"/>
+                <a:ea typeface="微軟正黑體"/>
+                <a:cs typeface="微軟正黑體"/>
+              </a:rPr>
+              <a:t>短按</a:t>
+            </a:r>
+            <a:endParaRPr sz="1300" b="1" dirty="0">
+              <a:solidFill>
+                <a:srgbClr val="333333"/>
+              </a:solidFill>
+              <a:latin typeface="微軟正黑體"/>
+              <a:ea typeface="微軟正黑體"/>
+              <a:cs typeface="微軟正黑體"/>
+            </a:endParaRPr>
+          </a:p>
+        </p:txBody>
+      </p:sp>
+      <p:sp>
+        <p:nvSpPr>
+          <p:cNvPr id="11" name="TextBox 9">
+            <a:extLst>
+              <a:ext uri="{FF2B5EF4-FFF2-40B4-BE49-F238E27FC236}">
+                <a16:creationId xmlns:a16="http://schemas.microsoft.com/office/drawing/2014/main" id="{DF7AF0B6-3FD6-4CB8-BCFE-7226B158B33F}"/>
+              </a:ext>
+            </a:extLst>
+          </p:cNvPr>
+          <p:cNvSpPr txBox="1"/>
+          <p:nvPr/>
+        </p:nvSpPr>
+        <p:spPr>
+          <a:xfrm>
+            <a:off x="4863001" y="3931980"/>
+            <a:ext cx="1169558" cy="415498"/>
+          </a:xfrm>
+          <a:prstGeom prst="rect">
+            <a:avLst/>
+          </a:prstGeom>
+          <a:noFill/>
+        </p:spPr>
+        <p:txBody>
+          <a:bodyPr wrap="square" anchor="t">
+            <a:spAutoFit/>
+          </a:bodyPr>
+          <a:lstStyle/>
+          <a:p>
+            <a:r>
+              <a:rPr lang="zh-TW" altLang="en-US" sz="1050" dirty="0">
+                <a:solidFill>
+                  <a:srgbClr val="757575"/>
+                </a:solidFill>
+                <a:latin typeface="微軟正黑體"/>
+                <a:ea typeface="微軟正黑體"/>
+                <a:cs typeface="微軟正黑體"/>
+              </a:rPr>
+              <a:t>跳過開機的 </a:t>
+            </a:r>
+            <a:r>
+              <a:rPr lang="en-US" altLang="zh-TW" sz="1050" dirty="0">
+                <a:solidFill>
+                  <a:srgbClr val="757575"/>
+                </a:solidFill>
+                <a:latin typeface="微軟正黑體"/>
+                <a:ea typeface="微軟正黑體"/>
+                <a:cs typeface="微軟正黑體"/>
+              </a:rPr>
+              <a:t>3 </a:t>
+            </a:r>
+            <a:r>
+              <a:rPr lang="zh-TW" altLang="en-US" sz="1050" dirty="0">
+                <a:solidFill>
+                  <a:srgbClr val="757575"/>
+                </a:solidFill>
+                <a:latin typeface="微軟正黑體"/>
+                <a:ea typeface="微軟正黑體"/>
+                <a:cs typeface="微軟正黑體"/>
+              </a:rPr>
+              <a:t>分鐘等待</a:t>
+            </a:r>
+            <a:endParaRPr sz="1050" b="0" dirty="0">
+              <a:solidFill>
+                <a:srgbClr val="757575"/>
+              </a:solidFill>
+              <a:latin typeface="微軟正黑體"/>
+              <a:ea typeface="微軟正黑體"/>
+              <a:cs typeface="微軟正黑體"/>
+            </a:endParaRPr>
+          </a:p>
+        </p:txBody>
+      </p:sp>
+      <p:sp>
+        <p:nvSpPr>
+          <p:cNvPr id="9" name="TextBox 8">
+            <a:extLst>
+              <a:ext uri="{FF2B5EF4-FFF2-40B4-BE49-F238E27FC236}">
+                <a16:creationId xmlns:a16="http://schemas.microsoft.com/office/drawing/2014/main" id="{81FAC93A-F7FB-EEEB-FFFA-22F1723961E7}"/>
+              </a:ext>
+            </a:extLst>
+          </p:cNvPr>
+          <p:cNvSpPr txBox="1"/>
+          <p:nvPr/>
+        </p:nvSpPr>
+        <p:spPr>
+          <a:xfrm>
+            <a:off x="7646446" y="2741220"/>
+            <a:ext cx="1169558" cy="492443"/>
+          </a:xfrm>
+          <a:prstGeom prst="rect">
+            <a:avLst/>
+          </a:prstGeom>
+          <a:noFill/>
+        </p:spPr>
+        <p:txBody>
+          <a:bodyPr wrap="square" anchor="t">
+            <a:spAutoFit/>
+          </a:bodyPr>
+          <a:lstStyle/>
+          <a:p>
+            <a:pPr>
+              <a:spcBef>
+                <a:spcPts val="600"/>
+              </a:spcBef>
+            </a:pPr>
+            <a:r>
+              <a:rPr lang="zh-TW" altLang="en-US" sz="1300" b="1" dirty="0">
+                <a:solidFill>
+                  <a:srgbClr val="333333"/>
+                </a:solidFill>
+                <a:latin typeface="微軟正黑體"/>
+                <a:ea typeface="微軟正黑體"/>
+                <a:cs typeface="微軟正黑體"/>
+              </a:rPr>
+              <a:t>重新通電時按住</a:t>
+            </a:r>
+          </a:p>
+        </p:txBody>
+      </p:sp>
+      <p:sp>
+        <p:nvSpPr>
+          <p:cNvPr id="12" name="TextBox 9">
+            <a:extLst>
+              <a:ext uri="{FF2B5EF4-FFF2-40B4-BE49-F238E27FC236}">
+                <a16:creationId xmlns:a16="http://schemas.microsoft.com/office/drawing/2014/main" id="{89635E93-E25D-64C7-C621-DB9D5BAD3A8A}"/>
+              </a:ext>
+            </a:extLst>
+          </p:cNvPr>
+          <p:cNvSpPr txBox="1"/>
+          <p:nvPr/>
+        </p:nvSpPr>
+        <p:spPr>
+          <a:xfrm>
+            <a:off x="7624451" y="3186764"/>
+            <a:ext cx="1169558" cy="380000"/>
+          </a:xfrm>
+          <a:prstGeom prst="rect">
+            <a:avLst/>
+          </a:prstGeom>
+          <a:noFill/>
+        </p:spPr>
+        <p:txBody>
+          <a:bodyPr wrap="square" anchor="t">
+            <a:spAutoFit/>
+          </a:bodyPr>
+          <a:lstStyle/>
+          <a:p>
+            <a:pPr>
+              <a:spcBef>
+                <a:spcPts val="100"/>
+              </a:spcBef>
+            </a:pPr>
+            <a:r>
+              <a:rPr lang="zh-TW" altLang="en-US" sz="1050" b="0" dirty="0">
+                <a:solidFill>
+                  <a:srgbClr val="B85C5C"/>
+                </a:solidFill>
+                <a:latin typeface="微軟正黑體"/>
+                <a:ea typeface="微軟正黑體"/>
+                <a:cs typeface="微軟正黑體"/>
+              </a:rPr>
+              <a:t>清除所有資料與設定</a:t>
+            </a:r>
+            <a:endParaRPr sz="1050" b="0" dirty="0">
               <a:solidFill>
                 <a:srgbClr val="757575"/>
               </a:solidFill>
@@ -16767,7 +17542,7 @@
                 <a:ea typeface="微軟正黑體"/>
                 <a:cs typeface="微軟正黑體"/>
               </a:rPr>
-              <a:t>二　設定裝置</a:t>
+              <a:t>二　設定 SmartGateway</a:t>
             </a:r>
           </a:p>
         </p:txBody>
@@ -17368,7 +18143,7 @@
                 <a:ea typeface="微軟正黑體"/>
                 <a:cs typeface="微軟正黑體"/>
               </a:rPr>
-              <a:t>手機連上裝置熱點</a:t>
+              <a:t>手機連上 SmartGateway 熱點</a:t>
             </a:r>
           </a:p>
           <a:p>
@@ -17381,7 +18156,7 @@
                 <a:ea typeface="微軟正黑體"/>
                 <a:cs typeface="微軟正黑體"/>
               </a:rPr>
-              <a:t>掃「1. Join WiFi」QR code，或搜尋「GATEWAY-XXXX」密碼 02750963</a:t>
+              <a:t>掃「1. Join WiFi」QR code，或搜尋「GATEWAY-XXXX」直接加入（無密碼）</a:t>
             </a:r>
           </a:p>
         </p:txBody>
@@ -17869,7 +18644,7 @@
         <p:spPr>
           <a:xfrm>
             <a:off x="365760" y="5212080"/>
-            <a:ext cx="4892040" cy="777240"/>
+            <a:ext cx="4892040" cy="984004"/>
           </a:xfrm>
           <a:prstGeom prst="roundRect">
             <a:avLst>
@@ -17940,7 +18715,7 @@
                 <a:ea typeface="微軟正黑體"/>
                 <a:cs typeface="微軟正黑體"/>
               </a:rPr>
-              <a:t>裝置已經在量測模式，之後想重新設定怎麼辦？</a:t>
+              <a:t>SmartGateway 已經在量測模式，之後想重新設定怎麼辦？</a:t>
             </a:r>
           </a:p>
           <a:p>
@@ -17960,7 +18735,7 @@
       </p:sp>
       <p:pic>
         <p:nvPicPr>
-          <p:cNvPr id="21" name="Picture 20" descr="screen_ap_config.png"/>
+          <p:cNvPr id="28" name="Picture 27" descr="screen_ap_config.png"/>
           <p:cNvPicPr>
             <a:picLocks noChangeAspect="1"/>
           </p:cNvPicPr>
